--- a/product/01_taikenkai-kit/src/guide.pptx
+++ b/product/01_taikenkai-kit/src/guide.pptx
@@ -9,6 +9,7 @@
     <p:sldId id="257" r:id="rId9"/>
     <p:sldId id="258" r:id="rId10"/>
     <p:sldId id="259" r:id="rId11"/>
+    <p:sldId id="260" r:id="rId12"/>
   </p:sldIdLst>
   <p:sldSz cx="7560000" cy="10692000" type="screen4x3"/>
   <p:notesSz cx="6858000" cy="9144000"/>
@@ -645,7 +646,7 @@
           <a:lstStyle/>
           <a:p>
             <a:r>
-              <a:t>告知に入れる項目チェックリスト</a:t>
+              <a:t>写真・QRコード・印刷</a:t>
             </a:r>
           </a:p>
         </p:txBody>
@@ -671,6 +672,76 @@
 </file>
 
 <file path=ppt/notesSlides/notesSlide4.xml><?xml version="1.0" encoding="utf-8"?>
+<p:notes xmlns:a="http://schemas.openxmlformats.org/drawingml/2006/main" xmlns:p="http://schemas.openxmlformats.org/presentationml/2006/main" xmlns:r="http://schemas.openxmlformats.org/officeDocument/2006/relationships">
+  <p:cSld>
+    <p:spTree>
+      <p:nvGrpSpPr>
+        <p:cNvPr id="1" name=""/>
+        <p:cNvGrpSpPr/>
+        <p:nvPr/>
+      </p:nvGrpSpPr>
+      <p:grpSpPr>
+        <a:xfrm>
+          <a:off x="0" y="0"/>
+          <a:ext cx="0" cy="0"/>
+          <a:chOff x="0" y="0"/>
+          <a:chExt cx="0" cy="0"/>
+        </a:xfrm>
+      </p:grpSpPr>
+      <p:sp>
+        <p:nvSpPr>
+          <p:cNvPr id="2" name="Slide Image Placeholder 1"/>
+          <p:cNvSpPr>
+            <a:spLocks noGrp="1"/>
+          </p:cNvSpPr>
+          <p:nvPr>
+            <p:ph type="sldImg" idx="2"/>
+          </p:nvPr>
+        </p:nvSpPr>
+        <p:spPr/>
+      </p:sp>
+      <p:sp>
+        <p:nvSpPr>
+          <p:cNvPr id="3" name="Notes Placeholder 2"/>
+          <p:cNvSpPr>
+            <a:spLocks noGrp="1"/>
+          </p:cNvSpPr>
+          <p:nvPr>
+            <p:ph type="body" idx="3" sz="quarter"/>
+          </p:nvPr>
+        </p:nvSpPr>
+        <p:spPr/>
+        <p:txBody>
+          <a:bodyPr/>
+          <a:lstStyle/>
+          <a:p>
+            <a:r>
+              <a:t>告知に入れる項目チェックリスト</a:t>
+            </a:r>
+          </a:p>
+        </p:txBody>
+      </p:sp>
+      <p:sp>
+        <p:nvSpPr>
+          <p:cNvPr id="4" name="Slide Number Placeholder 3"/>
+          <p:cNvSpPr>
+            <a:spLocks noGrp="1"/>
+          </p:cNvSpPr>
+          <p:nvPr>
+            <p:ph type="sldNum" idx="5" sz="quarter"/>
+          </p:nvPr>
+        </p:nvSpPr>
+        <p:spPr/>
+      </p:sp>
+    </p:spTree>
+  </p:cSld>
+  <p:clrMapOvr>
+    <a:masterClrMapping/>
+  </p:clrMapOvr>
+</p:notes>
+</file>
+
+<file path=ppt/notesSlides/notesSlide5.xml><?xml version="1.0" encoding="utf-8"?>
 <p:notes xmlns:a="http://schemas.openxmlformats.org/drawingml/2006/main" xmlns:p="http://schemas.openxmlformats.org/presentationml/2006/main" xmlns:r="http://schemas.openxmlformats.org/officeDocument/2006/relationships">
   <p:cSld>
     <p:spTree>
@@ -4480,7 +4551,7 @@
         <p:spPr>
           <a:xfrm>
             <a:off x="648000" y="4140000"/>
-            <a:ext cx="6264000" cy="3600000"/>
+            <a:ext cx="6264000" cy="4032000"/>
           </a:xfrm>
           <a:prstGeom prst="roundRect">
             <a:avLst>
@@ -4608,7 +4679,25 @@
                 <a:ea typeface="Zen Maru Gothic"/>
                 <a:cs typeface="Zen Maru Gothic"/>
               </a:rPr>
-              <a:t>・このガイド（使い方／告知チェックリスト／文例／利用範囲）</a:t>
+              <a:t>・フォント「Zen Maru Gothic」（無料・ライセンス文つき）</a:t>
+            </a:r>
+          </a:p>
+          <a:p>
+            <a:pPr algn="l">
+              <a:lnSpc>
+                <a:spcPct val="145000"/>
+              </a:lnSpc>
+            </a:pPr>
+            <a:r>
+              <a:rPr sz="1100" b="0">
+                <a:solidFill>
+                  <a:srgbClr val="2F3B40"/>
+                </a:solidFill>
+                <a:latin typeface="Zen Maru Gothic"/>
+                <a:ea typeface="Zen Maru Gothic"/>
+                <a:cs typeface="Zen Maru Gothic"/>
+              </a:rPr>
+              <a:t>・このガイド（5ページ）</a:t>
             </a:r>
           </a:p>
           <a:p>
@@ -4880,7 +4969,7 @@
                 <a:ea typeface="Zen Maru Gothic"/>
                 <a:cs typeface="Zen Maru Gothic"/>
               </a:rPr>
-              <a:t>2 / 4</a:t>
+              <a:t>2 / 5</a:t>
             </a:r>
           </a:p>
         </p:txBody>
@@ -4985,7 +5074,7 @@
             <a:r>
               <a:rPr sz="1200" b="1">
                 <a:solidFill>
-                  <a:srgbClr val="2A8C99"/>
+                  <a:srgbClr val="2F3B40"/>
                 </a:solidFill>
                 <a:latin typeface="Zen Maru Gothic"/>
                 <a:ea typeface="Zen Maru Gothic"/>
@@ -5045,7 +5134,7 @@
         </p:nvSpPr>
         <p:spPr>
           <a:xfrm>
-            <a:off x="648000" y="3528000"/>
+            <a:off x="648000" y="3456000"/>
             <a:ext cx="6264000" cy="324000"/>
           </a:xfrm>
           <a:prstGeom prst="roundRect">
@@ -5074,7 +5163,7 @@
         </p:nvSpPr>
         <p:spPr>
           <a:xfrm>
-            <a:off x="792000" y="3528000"/>
+            <a:off x="792000" y="3456000"/>
             <a:ext cx="5976000" cy="324000"/>
           </a:xfrm>
           <a:prstGeom prst="rect">
@@ -5096,7 +5185,7 @@
             <a:r>
               <a:rPr sz="1200" b="1">
                 <a:solidFill>
-                  <a:srgbClr val="2A8C99"/>
+                  <a:srgbClr val="2F3B40"/>
                 </a:solidFill>
                 <a:latin typeface="Zen Maru Gothic"/>
                 <a:ea typeface="Zen Maru Gothic"/>
@@ -5115,7 +5204,7 @@
         </p:nvSpPr>
         <p:spPr>
           <a:xfrm>
-            <a:off x="648000" y="3960000"/>
+            <a:off x="648000" y="3888000"/>
             <a:ext cx="6264000" cy="1440000"/>
           </a:xfrm>
           <a:prstGeom prst="rect">
@@ -5161,7 +5250,25 @@
                 <a:ea typeface="Zen Maru Gothic"/>
                 <a:cs typeface="Zen Maru Gothic"/>
               </a:rPr>
-              <a:t>水色（オレンジ）の四角は写真を入れる場所です。写真を入れたら、「ここに教室の写真」の文字は消してください。チラシのQRコードの枠も同じように差し替えます。</a:t>
+              <a:t>写真とQRコードの入れ方は、次のページを見てください。</a:t>
+            </a:r>
+          </a:p>
+          <a:p>
+            <a:pPr algn="l">
+              <a:lnSpc>
+                <a:spcPct val="145000"/>
+              </a:lnSpc>
+            </a:pPr>
+            <a:r>
+              <a:rPr sz="1050" b="0">
+                <a:solidFill>
+                  <a:srgbClr val="2F3B40"/>
+                </a:solidFill>
+                <a:latin typeface="Zen Maru Gothic"/>
+                <a:ea typeface="Zen Maru Gothic"/>
+                <a:cs typeface="Zen Maru Gothic"/>
+              </a:rPr>
+              <a:t>文字は1項目1〜2行までが目安です。長くなるときは、短く言いかえてください。</a:t>
             </a:r>
           </a:p>
         </p:txBody>
@@ -5174,7 +5281,7 @@
         </p:nvSpPr>
         <p:spPr>
           <a:xfrm>
-            <a:off x="648000" y="5616000"/>
+            <a:off x="648000" y="5472000"/>
             <a:ext cx="6264000" cy="324000"/>
           </a:xfrm>
           <a:prstGeom prst="roundRect">
@@ -5203,7 +5310,7 @@
         </p:nvSpPr>
         <p:spPr>
           <a:xfrm>
-            <a:off x="792000" y="5616000"/>
+            <a:off x="792000" y="5472000"/>
             <a:ext cx="5976000" cy="324000"/>
           </a:xfrm>
           <a:prstGeom prst="rect">
@@ -5225,7 +5332,7 @@
             <a:r>
               <a:rPr sz="1200" b="1">
                 <a:solidFill>
-                  <a:srgbClr val="2A8C99"/>
+                  <a:srgbClr val="2F3B40"/>
                 </a:solidFill>
                 <a:latin typeface="Zen Maru Gothic"/>
                 <a:ea typeface="Zen Maru Gothic"/>
@@ -5244,7 +5351,7 @@
         </p:nvSpPr>
         <p:spPr>
           <a:xfrm>
-            <a:off x="648000" y="6048000"/>
+            <a:off x="648000" y="5904000"/>
             <a:ext cx="6264000" cy="1440000"/>
           </a:xfrm>
           <a:prstGeom prst="rect">
@@ -5290,7 +5397,7 @@
                 <a:ea typeface="Zen Maru Gothic"/>
                 <a:cs typeface="Zen Maru Gothic"/>
               </a:rPr>
-              <a:t>・Instagram用：PNGかJPEG</a:t>
+              <a:t>・Instagram用：PNGかJPEG（1枚ずつ画像になります）</a:t>
             </a:r>
           </a:p>
           <a:p>
@@ -5308,21 +5415,50 @@
                 <a:ea typeface="Zen Maru Gothic"/>
                 <a:cs typeface="Zen Maru Gothic"/>
               </a:rPr>
-              <a:t>・チラシ：PDF（そのまま印刷できます）</a:t>
-            </a:r>
-          </a:p>
-        </p:txBody>
-      </p:sp>
-      <p:sp>
-        <p:nvSpPr>
-          <p:cNvPr id="15" name="TextBox 14"/>
+              <a:t>・チラシ：PDF。チラシのファイルには2色が1ページずつ入っています。使わない色のページを消してから保存してください。</a:t>
+            </a:r>
+          </a:p>
+        </p:txBody>
+      </p:sp>
+      <p:sp>
+        <p:nvSpPr>
+          <p:cNvPr id="15" name="Rounded Rectangle 14"/>
+          <p:cNvSpPr/>
+          <p:nvPr/>
+        </p:nvSpPr>
+        <p:spPr>
+          <a:xfrm>
+            <a:off x="648000" y="7632000"/>
+            <a:ext cx="6264000" cy="2304000"/>
+          </a:xfrm>
+          <a:prstGeom prst="roundRect">
+            <a:avLst>
+              <a:gd name="adj" fmla="val 5000"/>
+            </a:avLst>
+          </a:prstGeom>
+          <a:solidFill>
+            <a:srgbClr val="EAF6F7"/>
+          </a:solidFill>
+          <a:ln>
+            <a:noFill/>
+          </a:ln>
+        </p:spPr>
+        <p:txBody>
+          <a:bodyPr rtlCol="0" anchor="ctr"/>
+          <a:lstStyle/>
+          <a:p/>
+        </p:txBody>
+      </p:sp>
+      <p:sp>
+        <p:nvSpPr>
+          <p:cNvPr id="16" name="TextBox 15"/>
           <p:cNvSpPr txBox="1"/>
           <p:nvPr/>
         </p:nvSpPr>
         <p:spPr>
           <a:xfrm>
-            <a:off x="648000" y="7704000"/>
-            <a:ext cx="6264000" cy="2520000"/>
+            <a:off x="864000" y="7848000"/>
+            <a:ext cx="5832000" cy="7200000"/>
           </a:xfrm>
           <a:prstGeom prst="rect">
             <a:avLst/>
@@ -5349,7 +5485,7 @@
                 <a:ea typeface="Zen Maru Gothic"/>
                 <a:cs typeface="Zen Maru Gothic"/>
               </a:rPr>
-              <a:t>うまくいかないとき</a:t>
+              <a:t>文字の形について</a:t>
             </a:r>
           </a:p>
           <a:p>
@@ -5367,7 +5503,7 @@
                 <a:ea typeface="Zen Maru Gothic"/>
                 <a:cs typeface="Zen Maru Gothic"/>
               </a:rPr>
-              <a:t>・文字の形が見本と違う：見本は無料フォント「Zen Maru Gothic」を使っています。入っていない環境では別のフォントで表示されます。好きな丸ゴシック体に変えて使ってください。</a:t>
+              <a:t>見本は無料フォント「Zen Maru Gothic」で作っています。入っていない環境では、別のフォントで表示され、文字の幅が変わることがあります。</a:t>
             </a:r>
           </a:p>
           <a:p>
@@ -5385,7 +5521,7 @@
                 <a:ea typeface="Zen Maru Gothic"/>
                 <a:cs typeface="Zen Maru Gothic"/>
               </a:rPr>
-              <a:t>・文字がはみ出す：文字を少し減らすか、文字の大きさを1〜2段階小さくしてください。</a:t>
+              <a:t>・パソコン：同梱の「フォント」フォルダのファイルを開き、インストールしてください。</a:t>
             </a:r>
           </a:p>
           <a:p>
@@ -5403,7 +5539,25 @@
                 <a:ea typeface="Zen Maru Gothic"/>
                 <a:cs typeface="Zen Maru Gothic"/>
               </a:rPr>
-              <a:t>・アプリの細かい操作は、アプリごとに違います。各アプリのヘルプもあわせて確認してください。</a:t>
+              <a:t>・iPhone・iPad：フォントの追加は難しいため、表示されたフォントのまま使うか、アプリにある丸ゴシック体を選んでください。</a:t>
+            </a:r>
+          </a:p>
+          <a:p>
+            <a:pPr algn="l">
+              <a:lnSpc>
+                <a:spcPct val="145000"/>
+              </a:lnSpc>
+            </a:pPr>
+            <a:r>
+              <a:rPr sz="1000" b="0">
+                <a:solidFill>
+                  <a:srgbClr val="2F3B40"/>
+                </a:solidFill>
+                <a:latin typeface="Zen Maru Gothic"/>
+                <a:ea typeface="Zen Maru Gothic"/>
+                <a:cs typeface="Zen Maru Gothic"/>
+              </a:rPr>
+              <a:t>・文字がはみ出したら、文字を減らすか、1〜2段階小さくしてください。</a:t>
             </a:r>
           </a:p>
         </p:txBody>
@@ -5497,7 +5651,7 @@
                 <a:ea typeface="Zen Maru Gothic"/>
                 <a:cs typeface="Zen Maru Gothic"/>
               </a:rPr>
-              <a:t>告知に入れる項目チェックリスト</a:t>
+              <a:t>写真・QRコード・印刷</a:t>
             </a:r>
           </a:p>
         </p:txBody>
@@ -5538,7 +5692,7 @@
                 <a:ea typeface="Zen Maru Gothic"/>
                 <a:cs typeface="Zen Maru Gothic"/>
               </a:rPr>
-              <a:t>3 / 4</a:t>
+              <a:t>3 / 5</a:t>
             </a:r>
           </a:p>
         </p:txBody>
@@ -5592,8 +5746,8 @@
         </p:nvSpPr>
         <p:spPr>
           <a:xfrm>
-            <a:off x="648000" y="1296000"/>
-            <a:ext cx="6264000" cy="360000"/>
+            <a:off x="648000" y="1368000"/>
+            <a:ext cx="6264000" cy="8640000"/>
           </a:xfrm>
           <a:prstGeom prst="rect">
             <a:avLst/>
@@ -5608,7 +5762,25 @@
           <a:p>
             <a:pPr algn="l">
               <a:lnSpc>
-                <a:spcPct val="125000"/>
+                <a:spcPct val="145000"/>
+              </a:lnSpc>
+            </a:pPr>
+            <a:r>
+              <a:rPr sz="1200" b="1">
+                <a:solidFill>
+                  <a:srgbClr val="2A8C99"/>
+                </a:solidFill>
+                <a:latin typeface="Zen Maru Gothic"/>
+                <a:ea typeface="Zen Maru Gothic"/>
+                <a:cs typeface="Zen Maru Gothic"/>
+              </a:rPr>
+              <a:t>写真の入れ方（いちばん簡単な方法）</a:t>
+            </a:r>
+          </a:p>
+          <a:p>
+            <a:pPr algn="l">
+              <a:lnSpc>
+                <a:spcPct val="145000"/>
               </a:lnSpc>
             </a:pPr>
             <a:r>
@@ -5620,71 +5792,17 @@
                 <a:ea typeface="Zen Maru Gothic"/>
                 <a:cs typeface="Zen Maru Gothic"/>
               </a:rPr>
-              <a:t>書く前と、公開する前に見直すためのリストです。全部入れる必要はありません。</a:t>
-            </a:r>
-          </a:p>
-        </p:txBody>
-      </p:sp>
-      <p:sp>
-        <p:nvSpPr>
-          <p:cNvPr id="7" name="Rounded Rectangle 6"/>
-          <p:cNvSpPr/>
-          <p:nvPr/>
-        </p:nvSpPr>
-        <p:spPr>
-          <a:xfrm>
-            <a:off x="720000" y="1828800"/>
-            <a:ext cx="180000" cy="180000"/>
-          </a:xfrm>
-          <a:prstGeom prst="roundRect">
-            <a:avLst>
-              <a:gd name="adj" fmla="val 20000"/>
-            </a:avLst>
-          </a:prstGeom>
-          <a:solidFill>
-            <a:srgbClr val="FFFFFF"/>
-          </a:solidFill>
-          <a:ln w="18000">
-            <a:solidFill>
-              <a:srgbClr val="2A8C99"/>
-            </a:solidFill>
-          </a:ln>
-        </p:spPr>
-        <p:txBody>
-          <a:bodyPr rtlCol="0" anchor="ctr"/>
-          <a:lstStyle/>
-          <a:p/>
-        </p:txBody>
-      </p:sp>
-      <p:sp>
-        <p:nvSpPr>
-          <p:cNvPr id="8" name="TextBox 7"/>
-          <p:cNvSpPr txBox="1"/>
-          <p:nvPr/>
-        </p:nvSpPr>
-        <p:spPr>
-          <a:xfrm>
-            <a:off x="1044000" y="1800000"/>
-            <a:ext cx="1800000" cy="252000"/>
-          </a:xfrm>
-          <a:prstGeom prst="rect">
-            <a:avLst/>
-          </a:prstGeom>
-          <a:noFill/>
-        </p:spPr>
-        <p:txBody>
-          <a:bodyPr wrap="square" lIns="0" rIns="0" tIns="0" bIns="0" anchor="t">
-            <a:spAutoFit/>
-          </a:bodyPr>
-          <a:lstStyle/>
-          <a:p>
-            <a:pPr algn="l">
-              <a:lnSpc>
-                <a:spcPct val="125000"/>
-              </a:lnSpc>
-            </a:pPr>
-            <a:r>
-              <a:rPr sz="1100" b="1">
+              <a:t>1．「ここに教室の写真」と書かれた文字を選んで、消す</a:t>
+            </a:r>
+          </a:p>
+          <a:p>
+            <a:pPr algn="l">
+              <a:lnSpc>
+                <a:spcPct val="145000"/>
+              </a:lnSpc>
+            </a:pPr>
+            <a:r>
+              <a:rPr sz="1050" b="0">
                 <a:solidFill>
                   <a:srgbClr val="2F3B40"/>
                 </a:solidFill>
@@ -5692,40 +5810,17 @@
                 <a:ea typeface="Zen Maru Gothic"/>
                 <a:cs typeface="Zen Maru Gothic"/>
               </a:rPr>
-              <a:t>何の会か</a:t>
-            </a:r>
-          </a:p>
-        </p:txBody>
-      </p:sp>
-      <p:sp>
-        <p:nvSpPr>
-          <p:cNvPr id="9" name="TextBox 8"/>
-          <p:cNvSpPr txBox="1"/>
-          <p:nvPr/>
-        </p:nvSpPr>
-        <p:spPr>
-          <a:xfrm>
-            <a:off x="2880000" y="1810800"/>
-            <a:ext cx="3960000" cy="252000"/>
-          </a:xfrm>
-          <a:prstGeom prst="rect">
-            <a:avLst/>
-          </a:prstGeom>
-          <a:noFill/>
-        </p:spPr>
-        <p:txBody>
-          <a:bodyPr wrap="square" lIns="0" rIns="0" tIns="0" bIns="0" anchor="t">
-            <a:spAutoFit/>
-          </a:bodyPr>
-          <a:lstStyle/>
-          <a:p>
-            <a:pPr algn="l">
-              <a:lnSpc>
-                <a:spcPct val="125000"/>
-              </a:lnSpc>
-            </a:pPr>
-            <a:r>
-              <a:rPr sz="1000" b="0">
+              <a:t>2．色のついた四角（写真枠）を選んで、消す</a:t>
+            </a:r>
+          </a:p>
+          <a:p>
+            <a:pPr algn="l">
+              <a:lnSpc>
+                <a:spcPct val="145000"/>
+              </a:lnSpc>
+            </a:pPr>
+            <a:r>
+              <a:rPr sz="1050" b="0">
                 <a:solidFill>
                   <a:srgbClr val="2F3B40"/>
                 </a:solidFill>
@@ -5733,71 +5828,17 @@
                 <a:ea typeface="Zen Maru Gothic"/>
                 <a:cs typeface="Zen Maru Gothic"/>
               </a:rPr>
-              <a:t>体験会・見学会・説明会など</a:t>
-            </a:r>
-          </a:p>
-        </p:txBody>
-      </p:sp>
-      <p:sp>
-        <p:nvSpPr>
-          <p:cNvPr id="10" name="Rounded Rectangle 9"/>
-          <p:cNvSpPr/>
-          <p:nvPr/>
-        </p:nvSpPr>
-        <p:spPr>
-          <a:xfrm>
-            <a:off x="720000" y="2224800"/>
-            <a:ext cx="180000" cy="180000"/>
-          </a:xfrm>
-          <a:prstGeom prst="roundRect">
-            <a:avLst>
-              <a:gd name="adj" fmla="val 20000"/>
-            </a:avLst>
-          </a:prstGeom>
-          <a:solidFill>
-            <a:srgbClr val="FFFFFF"/>
-          </a:solidFill>
-          <a:ln w="18000">
-            <a:solidFill>
-              <a:srgbClr val="2A8C99"/>
-            </a:solidFill>
-          </a:ln>
-        </p:spPr>
-        <p:txBody>
-          <a:bodyPr rtlCol="0" anchor="ctr"/>
-          <a:lstStyle/>
-          <a:p/>
-        </p:txBody>
-      </p:sp>
-      <p:sp>
-        <p:nvSpPr>
-          <p:cNvPr id="11" name="TextBox 10"/>
-          <p:cNvSpPr txBox="1"/>
-          <p:nvPr/>
-        </p:nvSpPr>
-        <p:spPr>
-          <a:xfrm>
-            <a:off x="1044000" y="2196000"/>
-            <a:ext cx="1800000" cy="252000"/>
-          </a:xfrm>
-          <a:prstGeom prst="rect">
-            <a:avLst/>
-          </a:prstGeom>
-          <a:noFill/>
-        </p:spPr>
-        <p:txBody>
-          <a:bodyPr wrap="square" lIns="0" rIns="0" tIns="0" bIns="0" anchor="t">
-            <a:spAutoFit/>
-          </a:bodyPr>
-          <a:lstStyle/>
-          <a:p>
-            <a:pPr algn="l">
-              <a:lnSpc>
-                <a:spcPct val="125000"/>
-              </a:lnSpc>
-            </a:pPr>
-            <a:r>
-              <a:rPr sz="1100" b="1">
+              <a:t>3．写真を入れて、空いた場所に合わせて大きさを調整する</a:t>
+            </a:r>
+          </a:p>
+          <a:p>
+            <a:pPr algn="l">
+              <a:lnSpc>
+                <a:spcPct val="145000"/>
+              </a:lnSpc>
+            </a:pPr>
+            <a:r>
+              <a:rPr sz="950" b="0">
                 <a:solidFill>
                   <a:srgbClr val="2F3B40"/>
                 </a:solidFill>
@@ -5805,40 +5846,38 @@
                 <a:ea typeface="Zen Maru Gothic"/>
                 <a:cs typeface="Zen Maru Gothic"/>
               </a:rPr>
-              <a:t>日にちと曜日</a:t>
-            </a:r>
-          </a:p>
-        </p:txBody>
-      </p:sp>
-      <p:sp>
-        <p:nvSpPr>
-          <p:cNvPr id="12" name="TextBox 11"/>
-          <p:cNvSpPr txBox="1"/>
-          <p:nvPr/>
-        </p:nvSpPr>
-        <p:spPr>
-          <a:xfrm>
-            <a:off x="2880000" y="2206800"/>
-            <a:ext cx="3960000" cy="252000"/>
-          </a:xfrm>
-          <a:prstGeom prst="rect">
-            <a:avLst/>
-          </a:prstGeom>
-          <a:noFill/>
-        </p:spPr>
-        <p:txBody>
-          <a:bodyPr wrap="square" lIns="0" rIns="0" tIns="0" bIns="0" anchor="t">
-            <a:spAutoFit/>
-          </a:bodyPr>
-          <a:lstStyle/>
-          <a:p>
-            <a:pPr algn="l">
-              <a:lnSpc>
-                <a:spcPct val="125000"/>
-              </a:lnSpc>
-            </a:pPr>
-            <a:r>
-              <a:rPr sz="1000" b="0">
+              <a:t>※角を丸くしたい場合は、アプリの「図形に合わせてトリミング」や「マスク」の機能を使います（名前はアプリによって違います）。</a:t>
+            </a:r>
+          </a:p>
+          <a:p>
+            <a:pPr algn="l">
+              <a:lnSpc>
+                <a:spcPct val="145000"/>
+              </a:lnSpc>
+              <a:spcBef>
+                <a:spcPts val="800"/>
+              </a:spcBef>
+            </a:pPr>
+            <a:r>
+              <a:rPr sz="1200" b="1">
+                <a:solidFill>
+                  <a:srgbClr val="2A8C99"/>
+                </a:solidFill>
+                <a:latin typeface="Zen Maru Gothic"/>
+                <a:ea typeface="Zen Maru Gothic"/>
+                <a:cs typeface="Zen Maru Gothic"/>
+              </a:rPr>
+              <a:t>写真がないとき</a:t>
+            </a:r>
+          </a:p>
+          <a:p>
+            <a:pPr algn="l">
+              <a:lnSpc>
+                <a:spcPct val="145000"/>
+              </a:lnSpc>
+            </a:pPr>
+            <a:r>
+              <a:rPr sz="1050" b="0">
                 <a:solidFill>
                   <a:srgbClr val="2F3B40"/>
                 </a:solidFill>
@@ -5846,71 +5885,17 @@
                 <a:ea typeface="Zen Maru Gothic"/>
                 <a:cs typeface="Zen Maru Gothic"/>
               </a:rPr>
-              <a:t>カレンダーで曜日を確認</a:t>
-            </a:r>
-          </a:p>
-        </p:txBody>
-      </p:sp>
-      <p:sp>
-        <p:nvSpPr>
-          <p:cNvPr id="13" name="Rounded Rectangle 12"/>
-          <p:cNvSpPr/>
-          <p:nvPr/>
-        </p:nvSpPr>
-        <p:spPr>
-          <a:xfrm>
-            <a:off x="720000" y="2620800"/>
-            <a:ext cx="180000" cy="180000"/>
-          </a:xfrm>
-          <a:prstGeom prst="roundRect">
-            <a:avLst>
-              <a:gd name="adj" fmla="val 20000"/>
-            </a:avLst>
-          </a:prstGeom>
-          <a:solidFill>
-            <a:srgbClr val="FFFFFF"/>
-          </a:solidFill>
-          <a:ln w="18000">
-            <a:solidFill>
-              <a:srgbClr val="2A8C99"/>
-            </a:solidFill>
-          </a:ln>
-        </p:spPr>
-        <p:txBody>
-          <a:bodyPr rtlCol="0" anchor="ctr"/>
-          <a:lstStyle/>
-          <a:p/>
-        </p:txBody>
-      </p:sp>
-      <p:sp>
-        <p:nvSpPr>
-          <p:cNvPr id="14" name="TextBox 13"/>
-          <p:cNvSpPr txBox="1"/>
-          <p:nvPr/>
-        </p:nvSpPr>
-        <p:spPr>
-          <a:xfrm>
-            <a:off x="1044000" y="2592000"/>
-            <a:ext cx="1800000" cy="252000"/>
-          </a:xfrm>
-          <a:prstGeom prst="rect">
-            <a:avLst/>
-          </a:prstGeom>
-          <a:noFill/>
-        </p:spPr>
-        <p:txBody>
-          <a:bodyPr wrap="square" lIns="0" rIns="0" tIns="0" bIns="0" anchor="t">
-            <a:spAutoFit/>
-          </a:bodyPr>
-          <a:lstStyle/>
-          <a:p>
-            <a:pPr algn="l">
-              <a:lnSpc>
-                <a:spcPct val="125000"/>
-              </a:lnSpc>
-            </a:pPr>
-            <a:r>
-              <a:rPr sz="1100" b="1">
+              <a:t>・写真枠をそのまま色の飾りとして残し、「ここに教室の写真」の文字だけ消す</a:t>
+            </a:r>
+          </a:p>
+          <a:p>
+            <a:pPr algn="l">
+              <a:lnSpc>
+                <a:spcPct val="145000"/>
+              </a:lnSpc>
+            </a:pPr>
+            <a:r>
+              <a:rPr sz="1050" b="0">
                 <a:solidFill>
                   <a:srgbClr val="2F3B40"/>
                 </a:solidFill>
@@ -5918,40 +5903,38 @@
                 <a:ea typeface="Zen Maru Gothic"/>
                 <a:cs typeface="Zen Maru Gothic"/>
               </a:rPr>
-              <a:t>時間</a:t>
-            </a:r>
-          </a:p>
-        </p:txBody>
-      </p:sp>
-      <p:sp>
-        <p:nvSpPr>
-          <p:cNvPr id="15" name="TextBox 14"/>
-          <p:cNvSpPr txBox="1"/>
-          <p:nvPr/>
-        </p:nvSpPr>
-        <p:spPr>
-          <a:xfrm>
-            <a:off x="2880000" y="2602800"/>
-            <a:ext cx="3960000" cy="252000"/>
-          </a:xfrm>
-          <a:prstGeom prst="rect">
-            <a:avLst/>
-          </a:prstGeom>
-          <a:noFill/>
-        </p:spPr>
-        <p:txBody>
-          <a:bodyPr wrap="square" lIns="0" rIns="0" tIns="0" bIns="0" anchor="t">
-            <a:spAutoFit/>
-          </a:bodyPr>
-          <a:lstStyle/>
-          <a:p>
-            <a:pPr algn="l">
-              <a:lnSpc>
-                <a:spcPct val="125000"/>
-              </a:lnSpc>
-            </a:pPr>
-            <a:r>
-              <a:rPr sz="1000" b="0">
+              <a:t>・または、作品や道具の写真（人が写っていないもの）を使う</a:t>
+            </a:r>
+          </a:p>
+          <a:p>
+            <a:pPr algn="l">
+              <a:lnSpc>
+                <a:spcPct val="145000"/>
+              </a:lnSpc>
+              <a:spcBef>
+                <a:spcPts val="800"/>
+              </a:spcBef>
+            </a:pPr>
+            <a:r>
+              <a:rPr sz="1200" b="1">
+                <a:solidFill>
+                  <a:srgbClr val="2A8C99"/>
+                </a:solidFill>
+                <a:latin typeface="Zen Maru Gothic"/>
+                <a:ea typeface="Zen Maru Gothic"/>
+                <a:cs typeface="Zen Maru Gothic"/>
+              </a:rPr>
+              <a:t>QRコードの入れ方</a:t>
+            </a:r>
+          </a:p>
+          <a:p>
+            <a:pPr algn="l">
+              <a:lnSpc>
+                <a:spcPct val="145000"/>
+              </a:lnSpc>
+            </a:pPr>
+            <a:r>
+              <a:rPr sz="1050" b="0">
                 <a:solidFill>
                   <a:srgbClr val="2F3B40"/>
                 </a:solidFill>
@@ -5959,71 +5942,17 @@
                 <a:ea typeface="Zen Maru Gothic"/>
                 <a:cs typeface="Zen Maru Gothic"/>
               </a:rPr>
-              <a:t>始まりと終わり</a:t>
-            </a:r>
-          </a:p>
-        </p:txBody>
-      </p:sp>
-      <p:sp>
-        <p:nvSpPr>
-          <p:cNvPr id="16" name="Rounded Rectangle 15"/>
-          <p:cNvSpPr/>
-          <p:nvPr/>
-        </p:nvSpPr>
-        <p:spPr>
-          <a:xfrm>
-            <a:off x="720000" y="3016800"/>
-            <a:ext cx="180000" cy="180000"/>
-          </a:xfrm>
-          <a:prstGeom prst="roundRect">
-            <a:avLst>
-              <a:gd name="adj" fmla="val 20000"/>
-            </a:avLst>
-          </a:prstGeom>
-          <a:solidFill>
-            <a:srgbClr val="FFFFFF"/>
-          </a:solidFill>
-          <a:ln w="18000">
-            <a:solidFill>
-              <a:srgbClr val="2A8C99"/>
-            </a:solidFill>
-          </a:ln>
-        </p:spPr>
-        <p:txBody>
-          <a:bodyPr rtlCol="0" anchor="ctr"/>
-          <a:lstStyle/>
-          <a:p/>
-        </p:txBody>
-      </p:sp>
-      <p:sp>
-        <p:nvSpPr>
-          <p:cNvPr id="17" name="TextBox 16"/>
-          <p:cNvSpPr txBox="1"/>
-          <p:nvPr/>
-        </p:nvSpPr>
-        <p:spPr>
-          <a:xfrm>
-            <a:off x="1044000" y="2988000"/>
-            <a:ext cx="1800000" cy="252000"/>
-          </a:xfrm>
-          <a:prstGeom prst="rect">
-            <a:avLst/>
-          </a:prstGeom>
-          <a:noFill/>
-        </p:spPr>
-        <p:txBody>
-          <a:bodyPr wrap="square" lIns="0" rIns="0" tIns="0" bIns="0" anchor="t">
-            <a:spAutoFit/>
-          </a:bodyPr>
-          <a:lstStyle/>
-          <a:p>
-            <a:pPr algn="l">
-              <a:lnSpc>
-                <a:spcPct val="125000"/>
-              </a:lnSpc>
-            </a:pPr>
-            <a:r>
-              <a:rPr sz="1100" b="1">
+              <a:t>・InstagramやLINEのアプリには、自分のアカウントのQRコードを表示・保存する画面があります。保存した画像を、チラシの「QRコードを置く」の枠に重ねてください。</a:t>
+            </a:r>
+          </a:p>
+          <a:p>
+            <a:pPr algn="l">
+              <a:lnSpc>
+                <a:spcPct val="145000"/>
+              </a:lnSpc>
+            </a:pPr>
+            <a:r>
+              <a:rPr sz="1050" b="0">
                 <a:solidFill>
                   <a:srgbClr val="2F3B40"/>
                 </a:solidFill>
@@ -6031,40 +5960,17 @@
                 <a:ea typeface="Zen Maru Gothic"/>
                 <a:cs typeface="Zen Maru Gothic"/>
               </a:rPr>
-              <a:t>対象の年齢</a:t>
-            </a:r>
-          </a:p>
-        </p:txBody>
-      </p:sp>
-      <p:sp>
-        <p:nvSpPr>
-          <p:cNvPr id="18" name="TextBox 17"/>
-          <p:cNvSpPr txBox="1"/>
-          <p:nvPr/>
-        </p:nvSpPr>
-        <p:spPr>
-          <a:xfrm>
-            <a:off x="2880000" y="2998800"/>
-            <a:ext cx="3960000" cy="252000"/>
-          </a:xfrm>
-          <a:prstGeom prst="rect">
-            <a:avLst/>
-          </a:prstGeom>
-          <a:noFill/>
-        </p:spPr>
-        <p:txBody>
-          <a:bodyPr wrap="square" lIns="0" rIns="0" tIns="0" bIns="0" anchor="t">
-            <a:spAutoFit/>
-          </a:bodyPr>
-          <a:lstStyle/>
-          <a:p>
-            <a:pPr algn="l">
-              <a:lnSpc>
-                <a:spcPct val="125000"/>
-              </a:lnSpc>
-            </a:pPr>
-            <a:r>
-              <a:rPr sz="1000" b="0">
+              <a:t>・使わない場合は、枠と文字を消してください。</a:t>
+            </a:r>
+          </a:p>
+          <a:p>
+            <a:pPr algn="l">
+              <a:lnSpc>
+                <a:spcPct val="145000"/>
+              </a:lnSpc>
+            </a:pPr>
+            <a:r>
+              <a:rPr sz="1050" b="0">
                 <a:solidFill>
                   <a:srgbClr val="2F3B40"/>
                 </a:solidFill>
@@ -6072,71 +5978,38 @@
                 <a:ea typeface="Zen Maru Gothic"/>
                 <a:cs typeface="Zen Maru Gothic"/>
               </a:rPr>
-              <a:t>「3〜6さい」など</a:t>
-            </a:r>
-          </a:p>
-        </p:txBody>
-      </p:sp>
-      <p:sp>
-        <p:nvSpPr>
-          <p:cNvPr id="19" name="Rounded Rectangle 18"/>
-          <p:cNvSpPr/>
-          <p:nvPr/>
-        </p:nvSpPr>
-        <p:spPr>
-          <a:xfrm>
-            <a:off x="720000" y="3412800"/>
-            <a:ext cx="180000" cy="180000"/>
-          </a:xfrm>
-          <a:prstGeom prst="roundRect">
-            <a:avLst>
-              <a:gd name="adj" fmla="val 20000"/>
-            </a:avLst>
-          </a:prstGeom>
-          <a:solidFill>
-            <a:srgbClr val="FFFFFF"/>
-          </a:solidFill>
-          <a:ln w="18000">
-            <a:solidFill>
-              <a:srgbClr val="2A8C99"/>
-            </a:solidFill>
-          </a:ln>
-        </p:spPr>
-        <p:txBody>
-          <a:bodyPr rtlCol="0" anchor="ctr"/>
-          <a:lstStyle/>
-          <a:p/>
-        </p:txBody>
-      </p:sp>
-      <p:sp>
-        <p:nvSpPr>
-          <p:cNvPr id="20" name="TextBox 19"/>
-          <p:cNvSpPr txBox="1"/>
-          <p:nvPr/>
-        </p:nvSpPr>
-        <p:spPr>
-          <a:xfrm>
-            <a:off x="1044000" y="3384000"/>
-            <a:ext cx="1800000" cy="252000"/>
-          </a:xfrm>
-          <a:prstGeom prst="rect">
-            <a:avLst/>
-          </a:prstGeom>
-          <a:noFill/>
-        </p:spPr>
-        <p:txBody>
-          <a:bodyPr wrap="square" lIns="0" rIns="0" tIns="0" bIns="0" anchor="t">
-            <a:spAutoFit/>
-          </a:bodyPr>
-          <a:lstStyle/>
-          <a:p>
-            <a:pPr algn="l">
-              <a:lnSpc>
-                <a:spcPct val="125000"/>
-              </a:lnSpc>
-            </a:pPr>
-            <a:r>
-              <a:rPr sz="1100" b="1">
+              <a:t>・印刷したら、スマホで読み取れるか必ず試してください。</a:t>
+            </a:r>
+          </a:p>
+          <a:p>
+            <a:pPr algn="l">
+              <a:lnSpc>
+                <a:spcPct val="145000"/>
+              </a:lnSpc>
+              <a:spcBef>
+                <a:spcPts val="800"/>
+              </a:spcBef>
+            </a:pPr>
+            <a:r>
+              <a:rPr sz="1200" b="1">
+                <a:solidFill>
+                  <a:srgbClr val="2A8C99"/>
+                </a:solidFill>
+                <a:latin typeface="Zen Maru Gothic"/>
+                <a:ea typeface="Zen Maru Gothic"/>
+                <a:cs typeface="Zen Maru Gothic"/>
+              </a:rPr>
+              <a:t>印刷について</a:t>
+            </a:r>
+          </a:p>
+          <a:p>
+            <a:pPr algn="l">
+              <a:lnSpc>
+                <a:spcPct val="145000"/>
+              </a:lnSpc>
+            </a:pPr>
+            <a:r>
+              <a:rPr sz="1050" b="0">
                 <a:solidFill>
                   <a:srgbClr val="2F3B40"/>
                 </a:solidFill>
@@ -6144,40 +6017,17 @@
                 <a:ea typeface="Zen Maru Gothic"/>
                 <a:cs typeface="Zen Maru Gothic"/>
               </a:rPr>
-              <a:t>何をするか</a:t>
-            </a:r>
-          </a:p>
-        </p:txBody>
-      </p:sp>
-      <p:sp>
-        <p:nvSpPr>
-          <p:cNvPr id="21" name="TextBox 20"/>
-          <p:cNvSpPr txBox="1"/>
-          <p:nvPr/>
-        </p:nvSpPr>
-        <p:spPr>
-          <a:xfrm>
-            <a:off x="2880000" y="3394800"/>
-            <a:ext cx="3960000" cy="252000"/>
-          </a:xfrm>
-          <a:prstGeom prst="rect">
-            <a:avLst/>
-          </a:prstGeom>
-          <a:noFill/>
-        </p:spPr>
-        <p:txBody>
-          <a:bodyPr wrap="square" lIns="0" rIns="0" tIns="0" bIns="0" anchor="t">
-            <a:spAutoFit/>
-          </a:bodyPr>
-          <a:lstStyle/>
-          <a:p>
-            <a:pPr algn="l">
-              <a:lnSpc>
-                <a:spcPct val="125000"/>
-              </a:lnSpc>
-            </a:pPr>
-            <a:r>
-              <a:rPr sz="1000" b="0">
+              <a:t>・チラシの背景色は紙の端まであります。家庭用プリンターでは、まわりに白いふちが出たり、少し縮小されたりします。</a:t>
+            </a:r>
+          </a:p>
+          <a:p>
+            <a:pPr algn="l">
+              <a:lnSpc>
+                <a:spcPct val="145000"/>
+              </a:lnSpc>
+            </a:pPr>
+            <a:r>
+              <a:rPr sz="1050" b="0">
                 <a:solidFill>
                   <a:srgbClr val="2F3B40"/>
                 </a:solidFill>
@@ -6185,71 +6035,17 @@
                 <a:ea typeface="Zen Maru Gothic"/>
                 <a:cs typeface="Zen Maru Gothic"/>
               </a:rPr>
-              <a:t>1文で。持ち帰るものがあれば書く</a:t>
-            </a:r>
-          </a:p>
-        </p:txBody>
-      </p:sp>
-      <p:sp>
-        <p:nvSpPr>
-          <p:cNvPr id="22" name="Rounded Rectangle 21"/>
-          <p:cNvSpPr/>
-          <p:nvPr/>
-        </p:nvSpPr>
-        <p:spPr>
-          <a:xfrm>
-            <a:off x="720000" y="3808800"/>
-            <a:ext cx="180000" cy="180000"/>
-          </a:xfrm>
-          <a:prstGeom prst="roundRect">
-            <a:avLst>
-              <a:gd name="adj" fmla="val 20000"/>
-            </a:avLst>
-          </a:prstGeom>
-          <a:solidFill>
-            <a:srgbClr val="FFFFFF"/>
-          </a:solidFill>
-          <a:ln w="18000">
-            <a:solidFill>
-              <a:srgbClr val="2A8C99"/>
-            </a:solidFill>
-          </a:ln>
-        </p:spPr>
-        <p:txBody>
-          <a:bodyPr rtlCol="0" anchor="ctr"/>
-          <a:lstStyle/>
-          <a:p/>
-        </p:txBody>
-      </p:sp>
-      <p:sp>
-        <p:nvSpPr>
-          <p:cNvPr id="23" name="TextBox 22"/>
-          <p:cNvSpPr txBox="1"/>
-          <p:nvPr/>
-        </p:nvSpPr>
-        <p:spPr>
-          <a:xfrm>
-            <a:off x="1044000" y="3780000"/>
-            <a:ext cx="1800000" cy="252000"/>
-          </a:xfrm>
-          <a:prstGeom prst="rect">
-            <a:avLst/>
-          </a:prstGeom>
-          <a:noFill/>
-        </p:spPr>
-        <p:txBody>
-          <a:bodyPr wrap="square" lIns="0" rIns="0" tIns="0" bIns="0" anchor="t">
-            <a:spAutoFit/>
-          </a:bodyPr>
-          <a:lstStyle/>
-          <a:p>
-            <a:pPr algn="l">
-              <a:lnSpc>
-                <a:spcPct val="125000"/>
-              </a:lnSpc>
-            </a:pPr>
-            <a:r>
-              <a:rPr sz="1100" b="1">
+              <a:t>・背景色のインクを減らしたい場合は、「背景」の四角を消すと白い紙になります。</a:t>
+            </a:r>
+          </a:p>
+          <a:p>
+            <a:pPr algn="l">
+              <a:lnSpc>
+                <a:spcPct val="145000"/>
+              </a:lnSpc>
+            </a:pPr>
+            <a:r>
+              <a:rPr sz="1050" b="0">
                 <a:solidFill>
                   <a:srgbClr val="2F3B40"/>
                 </a:solidFill>
@@ -6257,904 +6053,7 @@
                 <a:ea typeface="Zen Maru Gothic"/>
                 <a:cs typeface="Zen Maru Gothic"/>
               </a:rPr>
-              <a:t>料金</a:t>
-            </a:r>
-          </a:p>
-        </p:txBody>
-      </p:sp>
-      <p:sp>
-        <p:nvSpPr>
-          <p:cNvPr id="24" name="TextBox 23"/>
-          <p:cNvSpPr txBox="1"/>
-          <p:nvPr/>
-        </p:nvSpPr>
-        <p:spPr>
-          <a:xfrm>
-            <a:off x="2880000" y="3790800"/>
-            <a:ext cx="3960000" cy="252000"/>
-          </a:xfrm>
-          <a:prstGeom prst="rect">
-            <a:avLst/>
-          </a:prstGeom>
-          <a:noFill/>
-        </p:spPr>
-        <p:txBody>
-          <a:bodyPr wrap="square" lIns="0" rIns="0" tIns="0" bIns="0" anchor="t">
-            <a:spAutoFit/>
-          </a:bodyPr>
-          <a:lstStyle/>
-          <a:p>
-            <a:pPr algn="l">
-              <a:lnSpc>
-                <a:spcPct val="125000"/>
-              </a:lnSpc>
-            </a:pPr>
-            <a:r>
-              <a:rPr sz="1000" b="0">
-                <a:solidFill>
-                  <a:srgbClr val="2F3B40"/>
-                </a:solidFill>
-                <a:latin typeface="Zen Maru Gothic"/>
-                <a:ea typeface="Zen Maru Gothic"/>
-                <a:cs typeface="Zen Maru Gothic"/>
-              </a:rPr>
-              <a:t>材料費が入っているか</a:t>
-            </a:r>
-          </a:p>
-        </p:txBody>
-      </p:sp>
-      <p:sp>
-        <p:nvSpPr>
-          <p:cNvPr id="25" name="Rounded Rectangle 24"/>
-          <p:cNvSpPr/>
-          <p:nvPr/>
-        </p:nvSpPr>
-        <p:spPr>
-          <a:xfrm>
-            <a:off x="720000" y="4204800"/>
-            <a:ext cx="180000" cy="180000"/>
-          </a:xfrm>
-          <a:prstGeom prst="roundRect">
-            <a:avLst>
-              <a:gd name="adj" fmla="val 20000"/>
-            </a:avLst>
-          </a:prstGeom>
-          <a:solidFill>
-            <a:srgbClr val="FFFFFF"/>
-          </a:solidFill>
-          <a:ln w="18000">
-            <a:solidFill>
-              <a:srgbClr val="2A8C99"/>
-            </a:solidFill>
-          </a:ln>
-        </p:spPr>
-        <p:txBody>
-          <a:bodyPr rtlCol="0" anchor="ctr"/>
-          <a:lstStyle/>
-          <a:p/>
-        </p:txBody>
-      </p:sp>
-      <p:sp>
-        <p:nvSpPr>
-          <p:cNvPr id="26" name="TextBox 25"/>
-          <p:cNvSpPr txBox="1"/>
-          <p:nvPr/>
-        </p:nvSpPr>
-        <p:spPr>
-          <a:xfrm>
-            <a:off x="1044000" y="4176000"/>
-            <a:ext cx="1800000" cy="252000"/>
-          </a:xfrm>
-          <a:prstGeom prst="rect">
-            <a:avLst/>
-          </a:prstGeom>
-          <a:noFill/>
-        </p:spPr>
-        <p:txBody>
-          <a:bodyPr wrap="square" lIns="0" rIns="0" tIns="0" bIns="0" anchor="t">
-            <a:spAutoFit/>
-          </a:bodyPr>
-          <a:lstStyle/>
-          <a:p>
-            <a:pPr algn="l">
-              <a:lnSpc>
-                <a:spcPct val="125000"/>
-              </a:lnSpc>
-            </a:pPr>
-            <a:r>
-              <a:rPr sz="1100" b="1">
-                <a:solidFill>
-                  <a:srgbClr val="2F3B40"/>
-                </a:solidFill>
-                <a:latin typeface="Zen Maru Gothic"/>
-                <a:ea typeface="Zen Maru Gothic"/>
-                <a:cs typeface="Zen Maru Gothic"/>
-              </a:rPr>
-              <a:t>定員と決め方</a:t>
-            </a:r>
-          </a:p>
-        </p:txBody>
-      </p:sp>
-      <p:sp>
-        <p:nvSpPr>
-          <p:cNvPr id="27" name="TextBox 26"/>
-          <p:cNvSpPr txBox="1"/>
-          <p:nvPr/>
-        </p:nvSpPr>
-        <p:spPr>
-          <a:xfrm>
-            <a:off x="2880000" y="4186800"/>
-            <a:ext cx="3960000" cy="252000"/>
-          </a:xfrm>
-          <a:prstGeom prst="rect">
-            <a:avLst/>
-          </a:prstGeom>
-          <a:noFill/>
-        </p:spPr>
-        <p:txBody>
-          <a:bodyPr wrap="square" lIns="0" rIns="0" tIns="0" bIns="0" anchor="t">
-            <a:spAutoFit/>
-          </a:bodyPr>
-          <a:lstStyle/>
-          <a:p>
-            <a:pPr algn="l">
-              <a:lnSpc>
-                <a:spcPct val="125000"/>
-              </a:lnSpc>
-            </a:pPr>
-            <a:r>
-              <a:rPr sz="1000" b="0">
-                <a:solidFill>
-                  <a:srgbClr val="2F3B40"/>
-                </a:solidFill>
-                <a:latin typeface="Zen Maru Gothic"/>
-                <a:ea typeface="Zen Maru Gothic"/>
-                <a:cs typeface="Zen Maru Gothic"/>
-              </a:rPr>
-              <a:t>先着順・抽選など</a:t>
-            </a:r>
-          </a:p>
-        </p:txBody>
-      </p:sp>
-      <p:sp>
-        <p:nvSpPr>
-          <p:cNvPr id="28" name="Rounded Rectangle 27"/>
-          <p:cNvSpPr/>
-          <p:nvPr/>
-        </p:nvSpPr>
-        <p:spPr>
-          <a:xfrm>
-            <a:off x="720000" y="4600800"/>
-            <a:ext cx="180000" cy="180000"/>
-          </a:xfrm>
-          <a:prstGeom prst="roundRect">
-            <a:avLst>
-              <a:gd name="adj" fmla="val 20000"/>
-            </a:avLst>
-          </a:prstGeom>
-          <a:solidFill>
-            <a:srgbClr val="FFFFFF"/>
-          </a:solidFill>
-          <a:ln w="18000">
-            <a:solidFill>
-              <a:srgbClr val="2A8C99"/>
-            </a:solidFill>
-          </a:ln>
-        </p:spPr>
-        <p:txBody>
-          <a:bodyPr rtlCol="0" anchor="ctr"/>
-          <a:lstStyle/>
-          <a:p/>
-        </p:txBody>
-      </p:sp>
-      <p:sp>
-        <p:nvSpPr>
-          <p:cNvPr id="29" name="TextBox 28"/>
-          <p:cNvSpPr txBox="1"/>
-          <p:nvPr/>
-        </p:nvSpPr>
-        <p:spPr>
-          <a:xfrm>
-            <a:off x="1044000" y="4572000"/>
-            <a:ext cx="1800000" cy="252000"/>
-          </a:xfrm>
-          <a:prstGeom prst="rect">
-            <a:avLst/>
-          </a:prstGeom>
-          <a:noFill/>
-        </p:spPr>
-        <p:txBody>
-          <a:bodyPr wrap="square" lIns="0" rIns="0" tIns="0" bIns="0" anchor="t">
-            <a:spAutoFit/>
-          </a:bodyPr>
-          <a:lstStyle/>
-          <a:p>
-            <a:pPr algn="l">
-              <a:lnSpc>
-                <a:spcPct val="125000"/>
-              </a:lnSpc>
-            </a:pPr>
-            <a:r>
-              <a:rPr sz="1100" b="1">
-                <a:solidFill>
-                  <a:srgbClr val="2F3B40"/>
-                </a:solidFill>
-                <a:latin typeface="Zen Maru Gothic"/>
-                <a:ea typeface="Zen Maru Gothic"/>
-                <a:cs typeface="Zen Maru Gothic"/>
-              </a:rPr>
-              <a:t>持ち物・服装</a:t>
-            </a:r>
-          </a:p>
-        </p:txBody>
-      </p:sp>
-      <p:sp>
-        <p:nvSpPr>
-          <p:cNvPr id="30" name="TextBox 29"/>
-          <p:cNvSpPr txBox="1"/>
-          <p:nvPr/>
-        </p:nvSpPr>
-        <p:spPr>
-          <a:xfrm>
-            <a:off x="2880000" y="4582800"/>
-            <a:ext cx="3960000" cy="252000"/>
-          </a:xfrm>
-          <a:prstGeom prst="rect">
-            <a:avLst/>
-          </a:prstGeom>
-          <a:noFill/>
-        </p:spPr>
-        <p:txBody>
-          <a:bodyPr wrap="square" lIns="0" rIns="0" tIns="0" bIns="0" anchor="t">
-            <a:spAutoFit/>
-          </a:bodyPr>
-          <a:lstStyle/>
-          <a:p>
-            <a:pPr algn="l">
-              <a:lnSpc>
-                <a:spcPct val="125000"/>
-              </a:lnSpc>
-            </a:pPr>
-            <a:r>
-              <a:rPr sz="1000" b="0">
-                <a:solidFill>
-                  <a:srgbClr val="2F3B40"/>
-                </a:solidFill>
-                <a:latin typeface="Zen Maru Gothic"/>
-                <a:ea typeface="Zen Maru Gothic"/>
-                <a:cs typeface="Zen Maru Gothic"/>
-              </a:rPr>
-              <a:t>よごれてもいい服など</a:t>
-            </a:r>
-          </a:p>
-        </p:txBody>
-      </p:sp>
-      <p:sp>
-        <p:nvSpPr>
-          <p:cNvPr id="31" name="Rounded Rectangle 30"/>
-          <p:cNvSpPr/>
-          <p:nvPr/>
-        </p:nvSpPr>
-        <p:spPr>
-          <a:xfrm>
-            <a:off x="720000" y="4996800"/>
-            <a:ext cx="180000" cy="180000"/>
-          </a:xfrm>
-          <a:prstGeom prst="roundRect">
-            <a:avLst>
-              <a:gd name="adj" fmla="val 20000"/>
-            </a:avLst>
-          </a:prstGeom>
-          <a:solidFill>
-            <a:srgbClr val="FFFFFF"/>
-          </a:solidFill>
-          <a:ln w="18000">
-            <a:solidFill>
-              <a:srgbClr val="2A8C99"/>
-            </a:solidFill>
-          </a:ln>
-        </p:spPr>
-        <p:txBody>
-          <a:bodyPr rtlCol="0" anchor="ctr"/>
-          <a:lstStyle/>
-          <a:p/>
-        </p:txBody>
-      </p:sp>
-      <p:sp>
-        <p:nvSpPr>
-          <p:cNvPr id="32" name="TextBox 31"/>
-          <p:cNvSpPr txBox="1"/>
-          <p:nvPr/>
-        </p:nvSpPr>
-        <p:spPr>
-          <a:xfrm>
-            <a:off x="1044000" y="4968000"/>
-            <a:ext cx="1800000" cy="252000"/>
-          </a:xfrm>
-          <a:prstGeom prst="rect">
-            <a:avLst/>
-          </a:prstGeom>
-          <a:noFill/>
-        </p:spPr>
-        <p:txBody>
-          <a:bodyPr wrap="square" lIns="0" rIns="0" tIns="0" bIns="0" anchor="t">
-            <a:spAutoFit/>
-          </a:bodyPr>
-          <a:lstStyle/>
-          <a:p>
-            <a:pPr algn="l">
-              <a:lnSpc>
-                <a:spcPct val="125000"/>
-              </a:lnSpc>
-            </a:pPr>
-            <a:r>
-              <a:rPr sz="1100" b="1">
-                <a:solidFill>
-                  <a:srgbClr val="2F3B40"/>
-                </a:solidFill>
-                <a:latin typeface="Zen Maru Gothic"/>
-                <a:ea typeface="Zen Maru Gothic"/>
-                <a:cs typeface="Zen Maru Gothic"/>
-              </a:rPr>
-              <a:t>場所</a:t>
-            </a:r>
-          </a:p>
-        </p:txBody>
-      </p:sp>
-      <p:sp>
-        <p:nvSpPr>
-          <p:cNvPr id="33" name="TextBox 32"/>
-          <p:cNvSpPr txBox="1"/>
-          <p:nvPr/>
-        </p:nvSpPr>
-        <p:spPr>
-          <a:xfrm>
-            <a:off x="2880000" y="4978800"/>
-            <a:ext cx="3960000" cy="252000"/>
-          </a:xfrm>
-          <a:prstGeom prst="rect">
-            <a:avLst/>
-          </a:prstGeom>
-          <a:noFill/>
-        </p:spPr>
-        <p:txBody>
-          <a:bodyPr wrap="square" lIns="0" rIns="0" tIns="0" bIns="0" anchor="t">
-            <a:spAutoFit/>
-          </a:bodyPr>
-          <a:lstStyle/>
-          <a:p>
-            <a:pPr algn="l">
-              <a:lnSpc>
-                <a:spcPct val="125000"/>
-              </a:lnSpc>
-            </a:pPr>
-            <a:r>
-              <a:rPr sz="1000" b="0">
-                <a:solidFill>
-                  <a:srgbClr val="2F3B40"/>
-                </a:solidFill>
-                <a:latin typeface="Zen Maru Gothic"/>
-                <a:ea typeface="Zen Maru Gothic"/>
-                <a:cs typeface="Zen Maru Gothic"/>
-              </a:rPr>
-              <a:t>自宅教室は、どこまで公開するか決める</a:t>
-            </a:r>
-          </a:p>
-        </p:txBody>
-      </p:sp>
-      <p:sp>
-        <p:nvSpPr>
-          <p:cNvPr id="34" name="Rounded Rectangle 33"/>
-          <p:cNvSpPr/>
-          <p:nvPr/>
-        </p:nvSpPr>
-        <p:spPr>
-          <a:xfrm>
-            <a:off x="720000" y="5392800"/>
-            <a:ext cx="180000" cy="180000"/>
-          </a:xfrm>
-          <a:prstGeom prst="roundRect">
-            <a:avLst>
-              <a:gd name="adj" fmla="val 20000"/>
-            </a:avLst>
-          </a:prstGeom>
-          <a:solidFill>
-            <a:srgbClr val="FFFFFF"/>
-          </a:solidFill>
-          <a:ln w="18000">
-            <a:solidFill>
-              <a:srgbClr val="2A8C99"/>
-            </a:solidFill>
-          </a:ln>
-        </p:spPr>
-        <p:txBody>
-          <a:bodyPr rtlCol="0" anchor="ctr"/>
-          <a:lstStyle/>
-          <a:p/>
-        </p:txBody>
-      </p:sp>
-      <p:sp>
-        <p:nvSpPr>
-          <p:cNvPr id="35" name="TextBox 34"/>
-          <p:cNvSpPr txBox="1"/>
-          <p:nvPr/>
-        </p:nvSpPr>
-        <p:spPr>
-          <a:xfrm>
-            <a:off x="1044000" y="5364000"/>
-            <a:ext cx="1800000" cy="252000"/>
-          </a:xfrm>
-          <a:prstGeom prst="rect">
-            <a:avLst/>
-          </a:prstGeom>
-          <a:noFill/>
-        </p:spPr>
-        <p:txBody>
-          <a:bodyPr wrap="square" lIns="0" rIns="0" tIns="0" bIns="0" anchor="t">
-            <a:spAutoFit/>
-          </a:bodyPr>
-          <a:lstStyle/>
-          <a:p>
-            <a:pPr algn="l">
-              <a:lnSpc>
-                <a:spcPct val="125000"/>
-              </a:lnSpc>
-            </a:pPr>
-            <a:r>
-              <a:rPr sz="1100" b="1">
-                <a:solidFill>
-                  <a:srgbClr val="2F3B40"/>
-                </a:solidFill>
-                <a:latin typeface="Zen Maru Gothic"/>
-                <a:ea typeface="Zen Maru Gothic"/>
-                <a:cs typeface="Zen Maru Gothic"/>
-              </a:rPr>
-              <a:t>申込方法</a:t>
-            </a:r>
-          </a:p>
-        </p:txBody>
-      </p:sp>
-      <p:sp>
-        <p:nvSpPr>
-          <p:cNvPr id="36" name="TextBox 35"/>
-          <p:cNvSpPr txBox="1"/>
-          <p:nvPr/>
-        </p:nvSpPr>
-        <p:spPr>
-          <a:xfrm>
-            <a:off x="2880000" y="5374800"/>
-            <a:ext cx="3960000" cy="252000"/>
-          </a:xfrm>
-          <a:prstGeom prst="rect">
-            <a:avLst/>
-          </a:prstGeom>
-          <a:noFill/>
-        </p:spPr>
-        <p:txBody>
-          <a:bodyPr wrap="square" lIns="0" rIns="0" tIns="0" bIns="0" anchor="t">
-            <a:spAutoFit/>
-          </a:bodyPr>
-          <a:lstStyle/>
-          <a:p>
-            <a:pPr algn="l">
-              <a:lnSpc>
-                <a:spcPct val="125000"/>
-              </a:lnSpc>
-            </a:pPr>
-            <a:r>
-              <a:rPr sz="1000" b="0">
-                <a:solidFill>
-                  <a:srgbClr val="2F3B40"/>
-                </a:solidFill>
-                <a:latin typeface="Zen Maru Gothic"/>
-                <a:ea typeface="Zen Maru Gothic"/>
-                <a:cs typeface="Zen Maru Gothic"/>
-              </a:rPr>
-              <a:t>何を送ってもらうか（名前・年齢・希望日）</a:t>
-            </a:r>
-          </a:p>
-        </p:txBody>
-      </p:sp>
-      <p:sp>
-        <p:nvSpPr>
-          <p:cNvPr id="37" name="Rounded Rectangle 36"/>
-          <p:cNvSpPr/>
-          <p:nvPr/>
-        </p:nvSpPr>
-        <p:spPr>
-          <a:xfrm>
-            <a:off x="720000" y="5788800"/>
-            <a:ext cx="180000" cy="180000"/>
-          </a:xfrm>
-          <a:prstGeom prst="roundRect">
-            <a:avLst>
-              <a:gd name="adj" fmla="val 20000"/>
-            </a:avLst>
-          </a:prstGeom>
-          <a:solidFill>
-            <a:srgbClr val="FFFFFF"/>
-          </a:solidFill>
-          <a:ln w="18000">
-            <a:solidFill>
-              <a:srgbClr val="2A8C99"/>
-            </a:solidFill>
-          </a:ln>
-        </p:spPr>
-        <p:txBody>
-          <a:bodyPr rtlCol="0" anchor="ctr"/>
-          <a:lstStyle/>
-          <a:p/>
-        </p:txBody>
-      </p:sp>
-      <p:sp>
-        <p:nvSpPr>
-          <p:cNvPr id="38" name="TextBox 37"/>
-          <p:cNvSpPr txBox="1"/>
-          <p:nvPr/>
-        </p:nvSpPr>
-        <p:spPr>
-          <a:xfrm>
-            <a:off x="1044000" y="5760000"/>
-            <a:ext cx="1800000" cy="252000"/>
-          </a:xfrm>
-          <a:prstGeom prst="rect">
-            <a:avLst/>
-          </a:prstGeom>
-          <a:noFill/>
-        </p:spPr>
-        <p:txBody>
-          <a:bodyPr wrap="square" lIns="0" rIns="0" tIns="0" bIns="0" anchor="t">
-            <a:spAutoFit/>
-          </a:bodyPr>
-          <a:lstStyle/>
-          <a:p>
-            <a:pPr algn="l">
-              <a:lnSpc>
-                <a:spcPct val="125000"/>
-              </a:lnSpc>
-            </a:pPr>
-            <a:r>
-              <a:rPr sz="1100" b="1">
-                <a:solidFill>
-                  <a:srgbClr val="2F3B40"/>
-                </a:solidFill>
-                <a:latin typeface="Zen Maru Gothic"/>
-                <a:ea typeface="Zen Maru Gothic"/>
-                <a:cs typeface="Zen Maru Gothic"/>
-              </a:rPr>
-              <a:t>しめきり</a:t>
-            </a:r>
-          </a:p>
-        </p:txBody>
-      </p:sp>
-      <p:sp>
-        <p:nvSpPr>
-          <p:cNvPr id="39" name="TextBox 38"/>
-          <p:cNvSpPr txBox="1"/>
-          <p:nvPr/>
-        </p:nvSpPr>
-        <p:spPr>
-          <a:xfrm>
-            <a:off x="2880000" y="5770800"/>
-            <a:ext cx="3960000" cy="252000"/>
-          </a:xfrm>
-          <a:prstGeom prst="rect">
-            <a:avLst/>
-          </a:prstGeom>
-          <a:noFill/>
-        </p:spPr>
-        <p:txBody>
-          <a:bodyPr wrap="square" lIns="0" rIns="0" tIns="0" bIns="0" anchor="t">
-            <a:spAutoFit/>
-          </a:bodyPr>
-          <a:lstStyle/>
-          <a:p>
-            <a:pPr algn="l">
-              <a:lnSpc>
-                <a:spcPct val="125000"/>
-              </a:lnSpc>
-            </a:pPr>
-            <a:r>
-              <a:rPr sz="1000" b="0">
-                <a:solidFill>
-                  <a:srgbClr val="2F3B40"/>
-                </a:solidFill>
-                <a:latin typeface="Zen Maru Gothic"/>
-                <a:ea typeface="Zen Maru Gothic"/>
-                <a:cs typeface="Zen Maru Gothic"/>
-              </a:rPr>
-              <a:t>日付と曜日</a:t>
-            </a:r>
-          </a:p>
-        </p:txBody>
-      </p:sp>
-      <p:sp>
-        <p:nvSpPr>
-          <p:cNvPr id="40" name="Rounded Rectangle 39"/>
-          <p:cNvSpPr/>
-          <p:nvPr/>
-        </p:nvSpPr>
-        <p:spPr>
-          <a:xfrm>
-            <a:off x="720000" y="6184800"/>
-            <a:ext cx="180000" cy="180000"/>
-          </a:xfrm>
-          <a:prstGeom prst="roundRect">
-            <a:avLst>
-              <a:gd name="adj" fmla="val 20000"/>
-            </a:avLst>
-          </a:prstGeom>
-          <a:solidFill>
-            <a:srgbClr val="FFFFFF"/>
-          </a:solidFill>
-          <a:ln w="18000">
-            <a:solidFill>
-              <a:srgbClr val="2A8C99"/>
-            </a:solidFill>
-          </a:ln>
-        </p:spPr>
-        <p:txBody>
-          <a:bodyPr rtlCol="0" anchor="ctr"/>
-          <a:lstStyle/>
-          <a:p/>
-        </p:txBody>
-      </p:sp>
-      <p:sp>
-        <p:nvSpPr>
-          <p:cNvPr id="41" name="TextBox 40"/>
-          <p:cNvSpPr txBox="1"/>
-          <p:nvPr/>
-        </p:nvSpPr>
-        <p:spPr>
-          <a:xfrm>
-            <a:off x="1044000" y="6156000"/>
-            <a:ext cx="1800000" cy="252000"/>
-          </a:xfrm>
-          <a:prstGeom prst="rect">
-            <a:avLst/>
-          </a:prstGeom>
-          <a:noFill/>
-        </p:spPr>
-        <p:txBody>
-          <a:bodyPr wrap="square" lIns="0" rIns="0" tIns="0" bIns="0" anchor="t">
-            <a:spAutoFit/>
-          </a:bodyPr>
-          <a:lstStyle/>
-          <a:p>
-            <a:pPr algn="l">
-              <a:lnSpc>
-                <a:spcPct val="125000"/>
-              </a:lnSpc>
-            </a:pPr>
-            <a:r>
-              <a:rPr sz="1100" b="1">
-                <a:solidFill>
-                  <a:srgbClr val="2F3B40"/>
-                </a:solidFill>
-                <a:latin typeface="Zen Maru Gothic"/>
-                <a:ea typeface="Zen Maru Gothic"/>
-                <a:cs typeface="Zen Maru Gothic"/>
-              </a:rPr>
-              <a:t>安心できる一言</a:t>
-            </a:r>
-          </a:p>
-        </p:txBody>
-      </p:sp>
-      <p:sp>
-        <p:nvSpPr>
-          <p:cNvPr id="42" name="TextBox 41"/>
-          <p:cNvSpPr txBox="1"/>
-          <p:nvPr/>
-        </p:nvSpPr>
-        <p:spPr>
-          <a:xfrm>
-            <a:off x="2880000" y="6166800"/>
-            <a:ext cx="3960000" cy="252000"/>
-          </a:xfrm>
-          <a:prstGeom prst="rect">
-            <a:avLst/>
-          </a:prstGeom>
-          <a:noFill/>
-        </p:spPr>
-        <p:txBody>
-          <a:bodyPr wrap="square" lIns="0" rIns="0" tIns="0" bIns="0" anchor="t">
-            <a:spAutoFit/>
-          </a:bodyPr>
-          <a:lstStyle/>
-          <a:p>
-            <a:pPr algn="l">
-              <a:lnSpc>
-                <a:spcPct val="125000"/>
-              </a:lnSpc>
-            </a:pPr>
-            <a:r>
-              <a:rPr sz="1000" b="0">
-                <a:solidFill>
-                  <a:srgbClr val="2F3B40"/>
-                </a:solidFill>
-                <a:latin typeface="Zen Maru Gothic"/>
-                <a:ea typeface="Zen Maru Gothic"/>
-                <a:cs typeface="Zen Maru Gothic"/>
-              </a:rPr>
-              <a:t>見学だけ・相談だけでもよい、など</a:t>
-            </a:r>
-          </a:p>
-        </p:txBody>
-      </p:sp>
-      <p:sp>
-        <p:nvSpPr>
-          <p:cNvPr id="43" name="Rounded Rectangle 42"/>
-          <p:cNvSpPr/>
-          <p:nvPr/>
-        </p:nvSpPr>
-        <p:spPr>
-          <a:xfrm>
-            <a:off x="648000" y="6696000"/>
-            <a:ext cx="6264000" cy="2376000"/>
-          </a:xfrm>
-          <a:prstGeom prst="roundRect">
-            <a:avLst>
-              <a:gd name="adj" fmla="val 5000"/>
-            </a:avLst>
-          </a:prstGeom>
-          <a:solidFill>
-            <a:srgbClr val="EAF6F7"/>
-          </a:solidFill>
-          <a:ln>
-            <a:noFill/>
-          </a:ln>
-        </p:spPr>
-        <p:txBody>
-          <a:bodyPr rtlCol="0" anchor="ctr"/>
-          <a:lstStyle/>
-          <a:p/>
-        </p:txBody>
-      </p:sp>
-      <p:sp>
-        <p:nvSpPr>
-          <p:cNvPr id="44" name="TextBox 43"/>
-          <p:cNvSpPr txBox="1"/>
-          <p:nvPr/>
-        </p:nvSpPr>
-        <p:spPr>
-          <a:xfrm>
-            <a:off x="864000" y="6912000"/>
-            <a:ext cx="5832000" cy="7200000"/>
-          </a:xfrm>
-          <a:prstGeom prst="rect">
-            <a:avLst/>
-          </a:prstGeom>
-          <a:noFill/>
-        </p:spPr>
-        <p:txBody>
-          <a:bodyPr wrap="square" lIns="0" rIns="0" tIns="0" bIns="0" anchor="t">
-            <a:spAutoFit/>
-          </a:bodyPr>
-          <a:lstStyle/>
-          <a:p>
-            <a:pPr algn="l">
-              <a:lnSpc>
-                <a:spcPct val="145000"/>
-              </a:lnSpc>
-            </a:pPr>
-            <a:r>
-              <a:rPr sz="1200" b="1">
-                <a:solidFill>
-                  <a:srgbClr val="2A8C99"/>
-                </a:solidFill>
-                <a:latin typeface="Zen Maru Gothic"/>
-                <a:ea typeface="Zen Maru Gothic"/>
-                <a:cs typeface="Zen Maru Gothic"/>
-              </a:rPr>
-              <a:t>公開・印刷の前に</a:t>
-            </a:r>
-          </a:p>
-          <a:p>
-            <a:pPr algn="l">
-              <a:lnSpc>
-                <a:spcPct val="145000"/>
-              </a:lnSpc>
-            </a:pPr>
-            <a:r>
-              <a:rPr sz="1050" b="0">
-                <a:solidFill>
-                  <a:srgbClr val="2F3B40"/>
-                </a:solidFill>
-                <a:latin typeface="Zen Maru Gothic"/>
-                <a:ea typeface="Zen Maru Gothic"/>
-                <a:cs typeface="Zen Maru Gothic"/>
-              </a:rPr>
-              <a:t>・日付と曜日が合っているか</a:t>
-            </a:r>
-          </a:p>
-          <a:p>
-            <a:pPr algn="l">
-              <a:lnSpc>
-                <a:spcPct val="145000"/>
-              </a:lnSpc>
-            </a:pPr>
-            <a:r>
-              <a:rPr sz="1050" b="0">
-                <a:solidFill>
-                  <a:srgbClr val="2F3B40"/>
-                </a:solidFill>
-                <a:latin typeface="Zen Maru Gothic"/>
-                <a:ea typeface="Zen Maru Gothic"/>
-                <a:cs typeface="Zen Maru Gothic"/>
-              </a:rPr>
-              <a:t>・料金や時間の数字が、全部の画像とチラシでそろっているか</a:t>
-            </a:r>
-          </a:p>
-          <a:p>
-            <a:pPr algn="l">
-              <a:lnSpc>
-                <a:spcPct val="145000"/>
-              </a:lnSpc>
-            </a:pPr>
-            <a:r>
-              <a:rPr sz="1050" b="0">
-                <a:solidFill>
-                  <a:srgbClr val="2F3B40"/>
-                </a:solidFill>
-                <a:latin typeface="Zen Maru Gothic"/>
-                <a:ea typeface="Zen Maru Gothic"/>
-                <a:cs typeface="Zen Maru Gothic"/>
-              </a:rPr>
-              <a:t>・電話番号、URL、QRコードが正しく開けるか</a:t>
-            </a:r>
-          </a:p>
-          <a:p>
-            <a:pPr algn="l">
-              <a:lnSpc>
-                <a:spcPct val="145000"/>
-              </a:lnSpc>
-            </a:pPr>
-            <a:r>
-              <a:rPr sz="1050" b="0">
-                <a:solidFill>
-                  <a:srgbClr val="2F3B40"/>
-                </a:solidFill>
-                <a:latin typeface="Zen Maru Gothic"/>
-                <a:ea typeface="Zen Maru Gothic"/>
-                <a:cs typeface="Zen Maru Gothic"/>
-              </a:rPr>
-              <a:t>・写真に写っている人の許可があるか（お子さんの写真は保護者の許可）</a:t>
-            </a:r>
-          </a:p>
-          <a:p>
-            <a:pPr algn="l">
-              <a:lnSpc>
-                <a:spcPct val="145000"/>
-              </a:lnSpc>
-            </a:pPr>
-            <a:r>
-              <a:rPr sz="1050" b="0">
-                <a:solidFill>
-                  <a:srgbClr val="2F3B40"/>
-                </a:solidFill>
-                <a:latin typeface="Zen Maru Gothic"/>
-                <a:ea typeface="Zen Maru Gothic"/>
-                <a:cs typeface="Zen Maru Gothic"/>
-              </a:rPr>
-              <a:t>・住所や家の外観など、出したくない情報が写っていないか</a:t>
-            </a:r>
-          </a:p>
-          <a:p>
-            <a:pPr algn="l">
-              <a:lnSpc>
-                <a:spcPct val="145000"/>
-              </a:lnSpc>
-            </a:pPr>
-            <a:r>
-              <a:rPr sz="1050" b="0">
-                <a:solidFill>
-                  <a:srgbClr val="2F3B40"/>
-                </a:solidFill>
-                <a:latin typeface="Zen Maru Gothic"/>
-                <a:ea typeface="Zen Maru Gothic"/>
-                <a:cs typeface="Zen Maru Gothic"/>
-              </a:rPr>
-              <a:t>・チラシは、試しに1枚印刷して文字が切れていないか</a:t>
+              <a:t>・最初に1枚だけ印刷して、文字が切れていないか確認してください。</a:t>
             </a:r>
           </a:p>
         </p:txBody>
@@ -7248,7 +6147,7 @@
                 <a:ea typeface="Zen Maru Gothic"/>
                 <a:cs typeface="Zen Maru Gothic"/>
               </a:rPr>
-              <a:t>文例と利用範囲</a:t>
+              <a:t>告知に入れる項目チェックリスト</a:t>
             </a:r>
           </a:p>
         </p:txBody>
@@ -7289,7 +6188,7 @@
                 <a:ea typeface="Zen Maru Gothic"/>
                 <a:cs typeface="Zen Maru Gothic"/>
               </a:rPr>
-              <a:t>4 / 4</a:t>
+              <a:t>4 / 5</a:t>
             </a:r>
           </a:p>
         </p:txBody>
@@ -7343,8 +6242,8 @@
         </p:nvSpPr>
         <p:spPr>
           <a:xfrm>
-            <a:off x="648000" y="1368000"/>
-            <a:ext cx="6264000" cy="4320000"/>
+            <a:off x="648000" y="1296000"/>
+            <a:ext cx="6264000" cy="360000"/>
           </a:xfrm>
           <a:prstGeom prst="rect">
             <a:avLst/>
@@ -7359,6 +6258,1432 @@
           <a:p>
             <a:pPr algn="l">
               <a:lnSpc>
+                <a:spcPct val="125000"/>
+              </a:lnSpc>
+            </a:pPr>
+            <a:r>
+              <a:rPr sz="1050" b="0">
+                <a:solidFill>
+                  <a:srgbClr val="2F3B40"/>
+                </a:solidFill>
+                <a:latin typeface="Zen Maru Gothic"/>
+                <a:ea typeface="Zen Maru Gothic"/>
+                <a:cs typeface="Zen Maru Gothic"/>
+              </a:rPr>
+              <a:t>書く前と、公開する前に見直すためのリストです。全部入れる必要はありません。</a:t>
+            </a:r>
+          </a:p>
+        </p:txBody>
+      </p:sp>
+      <p:sp>
+        <p:nvSpPr>
+          <p:cNvPr id="7" name="Rounded Rectangle 6"/>
+          <p:cNvSpPr/>
+          <p:nvPr/>
+        </p:nvSpPr>
+        <p:spPr>
+          <a:xfrm>
+            <a:off x="720000" y="1828800"/>
+            <a:ext cx="180000" cy="180000"/>
+          </a:xfrm>
+          <a:prstGeom prst="roundRect">
+            <a:avLst>
+              <a:gd name="adj" fmla="val 20000"/>
+            </a:avLst>
+          </a:prstGeom>
+          <a:solidFill>
+            <a:srgbClr val="FFFFFF"/>
+          </a:solidFill>
+          <a:ln w="18000">
+            <a:solidFill>
+              <a:srgbClr val="2A8C99"/>
+            </a:solidFill>
+          </a:ln>
+        </p:spPr>
+        <p:txBody>
+          <a:bodyPr rtlCol="0" anchor="ctr"/>
+          <a:lstStyle/>
+          <a:p/>
+        </p:txBody>
+      </p:sp>
+      <p:sp>
+        <p:nvSpPr>
+          <p:cNvPr id="8" name="TextBox 7"/>
+          <p:cNvSpPr txBox="1"/>
+          <p:nvPr/>
+        </p:nvSpPr>
+        <p:spPr>
+          <a:xfrm>
+            <a:off x="1044000" y="1800000"/>
+            <a:ext cx="1800000" cy="252000"/>
+          </a:xfrm>
+          <a:prstGeom prst="rect">
+            <a:avLst/>
+          </a:prstGeom>
+          <a:noFill/>
+        </p:spPr>
+        <p:txBody>
+          <a:bodyPr wrap="square" lIns="0" rIns="0" tIns="0" bIns="0" anchor="t">
+            <a:spAutoFit/>
+          </a:bodyPr>
+          <a:lstStyle/>
+          <a:p>
+            <a:pPr algn="l">
+              <a:lnSpc>
+                <a:spcPct val="125000"/>
+              </a:lnSpc>
+            </a:pPr>
+            <a:r>
+              <a:rPr sz="1100" b="1">
+                <a:solidFill>
+                  <a:srgbClr val="2F3B40"/>
+                </a:solidFill>
+                <a:latin typeface="Zen Maru Gothic"/>
+                <a:ea typeface="Zen Maru Gothic"/>
+                <a:cs typeface="Zen Maru Gothic"/>
+              </a:rPr>
+              <a:t>何の会か</a:t>
+            </a:r>
+          </a:p>
+        </p:txBody>
+      </p:sp>
+      <p:sp>
+        <p:nvSpPr>
+          <p:cNvPr id="9" name="TextBox 8"/>
+          <p:cNvSpPr txBox="1"/>
+          <p:nvPr/>
+        </p:nvSpPr>
+        <p:spPr>
+          <a:xfrm>
+            <a:off x="2880000" y="1810800"/>
+            <a:ext cx="3960000" cy="252000"/>
+          </a:xfrm>
+          <a:prstGeom prst="rect">
+            <a:avLst/>
+          </a:prstGeom>
+          <a:noFill/>
+        </p:spPr>
+        <p:txBody>
+          <a:bodyPr wrap="square" lIns="0" rIns="0" tIns="0" bIns="0" anchor="t">
+            <a:spAutoFit/>
+          </a:bodyPr>
+          <a:lstStyle/>
+          <a:p>
+            <a:pPr algn="l">
+              <a:lnSpc>
+                <a:spcPct val="125000"/>
+              </a:lnSpc>
+            </a:pPr>
+            <a:r>
+              <a:rPr sz="1050" b="0">
+                <a:solidFill>
+                  <a:srgbClr val="2F3B40"/>
+                </a:solidFill>
+                <a:latin typeface="Zen Maru Gothic"/>
+                <a:ea typeface="Zen Maru Gothic"/>
+                <a:cs typeface="Zen Maru Gothic"/>
+              </a:rPr>
+              <a:t>体験会・見学会・説明会など</a:t>
+            </a:r>
+          </a:p>
+        </p:txBody>
+      </p:sp>
+      <p:sp>
+        <p:nvSpPr>
+          <p:cNvPr id="10" name="Rounded Rectangle 9"/>
+          <p:cNvSpPr/>
+          <p:nvPr/>
+        </p:nvSpPr>
+        <p:spPr>
+          <a:xfrm>
+            <a:off x="720000" y="2224800"/>
+            <a:ext cx="180000" cy="180000"/>
+          </a:xfrm>
+          <a:prstGeom prst="roundRect">
+            <a:avLst>
+              <a:gd name="adj" fmla="val 20000"/>
+            </a:avLst>
+          </a:prstGeom>
+          <a:solidFill>
+            <a:srgbClr val="FFFFFF"/>
+          </a:solidFill>
+          <a:ln w="18000">
+            <a:solidFill>
+              <a:srgbClr val="2A8C99"/>
+            </a:solidFill>
+          </a:ln>
+        </p:spPr>
+        <p:txBody>
+          <a:bodyPr rtlCol="0" anchor="ctr"/>
+          <a:lstStyle/>
+          <a:p/>
+        </p:txBody>
+      </p:sp>
+      <p:sp>
+        <p:nvSpPr>
+          <p:cNvPr id="11" name="TextBox 10"/>
+          <p:cNvSpPr txBox="1"/>
+          <p:nvPr/>
+        </p:nvSpPr>
+        <p:spPr>
+          <a:xfrm>
+            <a:off x="1044000" y="2196000"/>
+            <a:ext cx="1800000" cy="252000"/>
+          </a:xfrm>
+          <a:prstGeom prst="rect">
+            <a:avLst/>
+          </a:prstGeom>
+          <a:noFill/>
+        </p:spPr>
+        <p:txBody>
+          <a:bodyPr wrap="square" lIns="0" rIns="0" tIns="0" bIns="0" anchor="t">
+            <a:spAutoFit/>
+          </a:bodyPr>
+          <a:lstStyle/>
+          <a:p>
+            <a:pPr algn="l">
+              <a:lnSpc>
+                <a:spcPct val="125000"/>
+              </a:lnSpc>
+            </a:pPr>
+            <a:r>
+              <a:rPr sz="1100" b="1">
+                <a:solidFill>
+                  <a:srgbClr val="2F3B40"/>
+                </a:solidFill>
+                <a:latin typeface="Zen Maru Gothic"/>
+                <a:ea typeface="Zen Maru Gothic"/>
+                <a:cs typeface="Zen Maru Gothic"/>
+              </a:rPr>
+              <a:t>日にちと曜日</a:t>
+            </a:r>
+          </a:p>
+        </p:txBody>
+      </p:sp>
+      <p:sp>
+        <p:nvSpPr>
+          <p:cNvPr id="12" name="TextBox 11"/>
+          <p:cNvSpPr txBox="1"/>
+          <p:nvPr/>
+        </p:nvSpPr>
+        <p:spPr>
+          <a:xfrm>
+            <a:off x="2880000" y="2206800"/>
+            <a:ext cx="3960000" cy="252000"/>
+          </a:xfrm>
+          <a:prstGeom prst="rect">
+            <a:avLst/>
+          </a:prstGeom>
+          <a:noFill/>
+        </p:spPr>
+        <p:txBody>
+          <a:bodyPr wrap="square" lIns="0" rIns="0" tIns="0" bIns="0" anchor="t">
+            <a:spAutoFit/>
+          </a:bodyPr>
+          <a:lstStyle/>
+          <a:p>
+            <a:pPr algn="l">
+              <a:lnSpc>
+                <a:spcPct val="125000"/>
+              </a:lnSpc>
+            </a:pPr>
+            <a:r>
+              <a:rPr sz="1050" b="0">
+                <a:solidFill>
+                  <a:srgbClr val="2F3B40"/>
+                </a:solidFill>
+                <a:latin typeface="Zen Maru Gothic"/>
+                <a:ea typeface="Zen Maru Gothic"/>
+                <a:cs typeface="Zen Maru Gothic"/>
+              </a:rPr>
+              <a:t>カレンダーで曜日を確認</a:t>
+            </a:r>
+          </a:p>
+        </p:txBody>
+      </p:sp>
+      <p:sp>
+        <p:nvSpPr>
+          <p:cNvPr id="13" name="Rounded Rectangle 12"/>
+          <p:cNvSpPr/>
+          <p:nvPr/>
+        </p:nvSpPr>
+        <p:spPr>
+          <a:xfrm>
+            <a:off x="720000" y="2620800"/>
+            <a:ext cx="180000" cy="180000"/>
+          </a:xfrm>
+          <a:prstGeom prst="roundRect">
+            <a:avLst>
+              <a:gd name="adj" fmla="val 20000"/>
+            </a:avLst>
+          </a:prstGeom>
+          <a:solidFill>
+            <a:srgbClr val="FFFFFF"/>
+          </a:solidFill>
+          <a:ln w="18000">
+            <a:solidFill>
+              <a:srgbClr val="2A8C99"/>
+            </a:solidFill>
+          </a:ln>
+        </p:spPr>
+        <p:txBody>
+          <a:bodyPr rtlCol="0" anchor="ctr"/>
+          <a:lstStyle/>
+          <a:p/>
+        </p:txBody>
+      </p:sp>
+      <p:sp>
+        <p:nvSpPr>
+          <p:cNvPr id="14" name="TextBox 13"/>
+          <p:cNvSpPr txBox="1"/>
+          <p:nvPr/>
+        </p:nvSpPr>
+        <p:spPr>
+          <a:xfrm>
+            <a:off x="1044000" y="2592000"/>
+            <a:ext cx="1800000" cy="252000"/>
+          </a:xfrm>
+          <a:prstGeom prst="rect">
+            <a:avLst/>
+          </a:prstGeom>
+          <a:noFill/>
+        </p:spPr>
+        <p:txBody>
+          <a:bodyPr wrap="square" lIns="0" rIns="0" tIns="0" bIns="0" anchor="t">
+            <a:spAutoFit/>
+          </a:bodyPr>
+          <a:lstStyle/>
+          <a:p>
+            <a:pPr algn="l">
+              <a:lnSpc>
+                <a:spcPct val="125000"/>
+              </a:lnSpc>
+            </a:pPr>
+            <a:r>
+              <a:rPr sz="1100" b="1">
+                <a:solidFill>
+                  <a:srgbClr val="2F3B40"/>
+                </a:solidFill>
+                <a:latin typeface="Zen Maru Gothic"/>
+                <a:ea typeface="Zen Maru Gothic"/>
+                <a:cs typeface="Zen Maru Gothic"/>
+              </a:rPr>
+              <a:t>時間</a:t>
+            </a:r>
+          </a:p>
+        </p:txBody>
+      </p:sp>
+      <p:sp>
+        <p:nvSpPr>
+          <p:cNvPr id="15" name="TextBox 14"/>
+          <p:cNvSpPr txBox="1"/>
+          <p:nvPr/>
+        </p:nvSpPr>
+        <p:spPr>
+          <a:xfrm>
+            <a:off x="2880000" y="2602800"/>
+            <a:ext cx="3960000" cy="252000"/>
+          </a:xfrm>
+          <a:prstGeom prst="rect">
+            <a:avLst/>
+          </a:prstGeom>
+          <a:noFill/>
+        </p:spPr>
+        <p:txBody>
+          <a:bodyPr wrap="square" lIns="0" rIns="0" tIns="0" bIns="0" anchor="t">
+            <a:spAutoFit/>
+          </a:bodyPr>
+          <a:lstStyle/>
+          <a:p>
+            <a:pPr algn="l">
+              <a:lnSpc>
+                <a:spcPct val="125000"/>
+              </a:lnSpc>
+            </a:pPr>
+            <a:r>
+              <a:rPr sz="1050" b="0">
+                <a:solidFill>
+                  <a:srgbClr val="2F3B40"/>
+                </a:solidFill>
+                <a:latin typeface="Zen Maru Gothic"/>
+                <a:ea typeface="Zen Maru Gothic"/>
+                <a:cs typeface="Zen Maru Gothic"/>
+              </a:rPr>
+              <a:t>始まりと終わり</a:t>
+            </a:r>
+          </a:p>
+        </p:txBody>
+      </p:sp>
+      <p:sp>
+        <p:nvSpPr>
+          <p:cNvPr id="16" name="Rounded Rectangle 15"/>
+          <p:cNvSpPr/>
+          <p:nvPr/>
+        </p:nvSpPr>
+        <p:spPr>
+          <a:xfrm>
+            <a:off x="720000" y="3016800"/>
+            <a:ext cx="180000" cy="180000"/>
+          </a:xfrm>
+          <a:prstGeom prst="roundRect">
+            <a:avLst>
+              <a:gd name="adj" fmla="val 20000"/>
+            </a:avLst>
+          </a:prstGeom>
+          <a:solidFill>
+            <a:srgbClr val="FFFFFF"/>
+          </a:solidFill>
+          <a:ln w="18000">
+            <a:solidFill>
+              <a:srgbClr val="2A8C99"/>
+            </a:solidFill>
+          </a:ln>
+        </p:spPr>
+        <p:txBody>
+          <a:bodyPr rtlCol="0" anchor="ctr"/>
+          <a:lstStyle/>
+          <a:p/>
+        </p:txBody>
+      </p:sp>
+      <p:sp>
+        <p:nvSpPr>
+          <p:cNvPr id="17" name="TextBox 16"/>
+          <p:cNvSpPr txBox="1"/>
+          <p:nvPr/>
+        </p:nvSpPr>
+        <p:spPr>
+          <a:xfrm>
+            <a:off x="1044000" y="2988000"/>
+            <a:ext cx="1800000" cy="252000"/>
+          </a:xfrm>
+          <a:prstGeom prst="rect">
+            <a:avLst/>
+          </a:prstGeom>
+          <a:noFill/>
+        </p:spPr>
+        <p:txBody>
+          <a:bodyPr wrap="square" lIns="0" rIns="0" tIns="0" bIns="0" anchor="t">
+            <a:spAutoFit/>
+          </a:bodyPr>
+          <a:lstStyle/>
+          <a:p>
+            <a:pPr algn="l">
+              <a:lnSpc>
+                <a:spcPct val="125000"/>
+              </a:lnSpc>
+            </a:pPr>
+            <a:r>
+              <a:rPr sz="1100" b="1">
+                <a:solidFill>
+                  <a:srgbClr val="2F3B40"/>
+                </a:solidFill>
+                <a:latin typeface="Zen Maru Gothic"/>
+                <a:ea typeface="Zen Maru Gothic"/>
+                <a:cs typeface="Zen Maru Gothic"/>
+              </a:rPr>
+              <a:t>対象の年齢</a:t>
+            </a:r>
+          </a:p>
+        </p:txBody>
+      </p:sp>
+      <p:sp>
+        <p:nvSpPr>
+          <p:cNvPr id="18" name="TextBox 17"/>
+          <p:cNvSpPr txBox="1"/>
+          <p:nvPr/>
+        </p:nvSpPr>
+        <p:spPr>
+          <a:xfrm>
+            <a:off x="2880000" y="2998800"/>
+            <a:ext cx="3960000" cy="252000"/>
+          </a:xfrm>
+          <a:prstGeom prst="rect">
+            <a:avLst/>
+          </a:prstGeom>
+          <a:noFill/>
+        </p:spPr>
+        <p:txBody>
+          <a:bodyPr wrap="square" lIns="0" rIns="0" tIns="0" bIns="0" anchor="t">
+            <a:spAutoFit/>
+          </a:bodyPr>
+          <a:lstStyle/>
+          <a:p>
+            <a:pPr algn="l">
+              <a:lnSpc>
+                <a:spcPct val="125000"/>
+              </a:lnSpc>
+            </a:pPr>
+            <a:r>
+              <a:rPr sz="1050" b="0">
+                <a:solidFill>
+                  <a:srgbClr val="2F3B40"/>
+                </a:solidFill>
+                <a:latin typeface="Zen Maru Gothic"/>
+                <a:ea typeface="Zen Maru Gothic"/>
+                <a:cs typeface="Zen Maru Gothic"/>
+              </a:rPr>
+              <a:t>「3さい〜年長さん」など</a:t>
+            </a:r>
+          </a:p>
+        </p:txBody>
+      </p:sp>
+      <p:sp>
+        <p:nvSpPr>
+          <p:cNvPr id="19" name="Rounded Rectangle 18"/>
+          <p:cNvSpPr/>
+          <p:nvPr/>
+        </p:nvSpPr>
+        <p:spPr>
+          <a:xfrm>
+            <a:off x="720000" y="3412800"/>
+            <a:ext cx="180000" cy="180000"/>
+          </a:xfrm>
+          <a:prstGeom prst="roundRect">
+            <a:avLst>
+              <a:gd name="adj" fmla="val 20000"/>
+            </a:avLst>
+          </a:prstGeom>
+          <a:solidFill>
+            <a:srgbClr val="FFFFFF"/>
+          </a:solidFill>
+          <a:ln w="18000">
+            <a:solidFill>
+              <a:srgbClr val="2A8C99"/>
+            </a:solidFill>
+          </a:ln>
+        </p:spPr>
+        <p:txBody>
+          <a:bodyPr rtlCol="0" anchor="ctr"/>
+          <a:lstStyle/>
+          <a:p/>
+        </p:txBody>
+      </p:sp>
+      <p:sp>
+        <p:nvSpPr>
+          <p:cNvPr id="20" name="TextBox 19"/>
+          <p:cNvSpPr txBox="1"/>
+          <p:nvPr/>
+        </p:nvSpPr>
+        <p:spPr>
+          <a:xfrm>
+            <a:off x="1044000" y="3384000"/>
+            <a:ext cx="1800000" cy="252000"/>
+          </a:xfrm>
+          <a:prstGeom prst="rect">
+            <a:avLst/>
+          </a:prstGeom>
+          <a:noFill/>
+        </p:spPr>
+        <p:txBody>
+          <a:bodyPr wrap="square" lIns="0" rIns="0" tIns="0" bIns="0" anchor="t">
+            <a:spAutoFit/>
+          </a:bodyPr>
+          <a:lstStyle/>
+          <a:p>
+            <a:pPr algn="l">
+              <a:lnSpc>
+                <a:spcPct val="125000"/>
+              </a:lnSpc>
+            </a:pPr>
+            <a:r>
+              <a:rPr sz="1100" b="1">
+                <a:solidFill>
+                  <a:srgbClr val="2F3B40"/>
+                </a:solidFill>
+                <a:latin typeface="Zen Maru Gothic"/>
+                <a:ea typeface="Zen Maru Gothic"/>
+                <a:cs typeface="Zen Maru Gothic"/>
+              </a:rPr>
+              <a:t>何をするか</a:t>
+            </a:r>
+          </a:p>
+        </p:txBody>
+      </p:sp>
+      <p:sp>
+        <p:nvSpPr>
+          <p:cNvPr id="21" name="TextBox 20"/>
+          <p:cNvSpPr txBox="1"/>
+          <p:nvPr/>
+        </p:nvSpPr>
+        <p:spPr>
+          <a:xfrm>
+            <a:off x="2880000" y="3394800"/>
+            <a:ext cx="3960000" cy="252000"/>
+          </a:xfrm>
+          <a:prstGeom prst="rect">
+            <a:avLst/>
+          </a:prstGeom>
+          <a:noFill/>
+        </p:spPr>
+        <p:txBody>
+          <a:bodyPr wrap="square" lIns="0" rIns="0" tIns="0" bIns="0" anchor="t">
+            <a:spAutoFit/>
+          </a:bodyPr>
+          <a:lstStyle/>
+          <a:p>
+            <a:pPr algn="l">
+              <a:lnSpc>
+                <a:spcPct val="125000"/>
+              </a:lnSpc>
+            </a:pPr>
+            <a:r>
+              <a:rPr sz="1050" b="0">
+                <a:solidFill>
+                  <a:srgbClr val="2F3B40"/>
+                </a:solidFill>
+                <a:latin typeface="Zen Maru Gothic"/>
+                <a:ea typeface="Zen Maru Gothic"/>
+                <a:cs typeface="Zen Maru Gothic"/>
+              </a:rPr>
+              <a:t>1文で。持ち帰るものがあれば書く</a:t>
+            </a:r>
+          </a:p>
+        </p:txBody>
+      </p:sp>
+      <p:sp>
+        <p:nvSpPr>
+          <p:cNvPr id="22" name="Rounded Rectangle 21"/>
+          <p:cNvSpPr/>
+          <p:nvPr/>
+        </p:nvSpPr>
+        <p:spPr>
+          <a:xfrm>
+            <a:off x="720000" y="3808800"/>
+            <a:ext cx="180000" cy="180000"/>
+          </a:xfrm>
+          <a:prstGeom prst="roundRect">
+            <a:avLst>
+              <a:gd name="adj" fmla="val 20000"/>
+            </a:avLst>
+          </a:prstGeom>
+          <a:solidFill>
+            <a:srgbClr val="FFFFFF"/>
+          </a:solidFill>
+          <a:ln w="18000">
+            <a:solidFill>
+              <a:srgbClr val="2A8C99"/>
+            </a:solidFill>
+          </a:ln>
+        </p:spPr>
+        <p:txBody>
+          <a:bodyPr rtlCol="0" anchor="ctr"/>
+          <a:lstStyle/>
+          <a:p/>
+        </p:txBody>
+      </p:sp>
+      <p:sp>
+        <p:nvSpPr>
+          <p:cNvPr id="23" name="TextBox 22"/>
+          <p:cNvSpPr txBox="1"/>
+          <p:nvPr/>
+        </p:nvSpPr>
+        <p:spPr>
+          <a:xfrm>
+            <a:off x="1044000" y="3780000"/>
+            <a:ext cx="1800000" cy="252000"/>
+          </a:xfrm>
+          <a:prstGeom prst="rect">
+            <a:avLst/>
+          </a:prstGeom>
+          <a:noFill/>
+        </p:spPr>
+        <p:txBody>
+          <a:bodyPr wrap="square" lIns="0" rIns="0" tIns="0" bIns="0" anchor="t">
+            <a:spAutoFit/>
+          </a:bodyPr>
+          <a:lstStyle/>
+          <a:p>
+            <a:pPr algn="l">
+              <a:lnSpc>
+                <a:spcPct val="125000"/>
+              </a:lnSpc>
+            </a:pPr>
+            <a:r>
+              <a:rPr sz="1100" b="1">
+                <a:solidFill>
+                  <a:srgbClr val="2F3B40"/>
+                </a:solidFill>
+                <a:latin typeface="Zen Maru Gothic"/>
+                <a:ea typeface="Zen Maru Gothic"/>
+                <a:cs typeface="Zen Maru Gothic"/>
+              </a:rPr>
+              <a:t>料金</a:t>
+            </a:r>
+          </a:p>
+        </p:txBody>
+      </p:sp>
+      <p:sp>
+        <p:nvSpPr>
+          <p:cNvPr id="24" name="TextBox 23"/>
+          <p:cNvSpPr txBox="1"/>
+          <p:nvPr/>
+        </p:nvSpPr>
+        <p:spPr>
+          <a:xfrm>
+            <a:off x="2880000" y="3790800"/>
+            <a:ext cx="3960000" cy="252000"/>
+          </a:xfrm>
+          <a:prstGeom prst="rect">
+            <a:avLst/>
+          </a:prstGeom>
+          <a:noFill/>
+        </p:spPr>
+        <p:txBody>
+          <a:bodyPr wrap="square" lIns="0" rIns="0" tIns="0" bIns="0" anchor="t">
+            <a:spAutoFit/>
+          </a:bodyPr>
+          <a:lstStyle/>
+          <a:p>
+            <a:pPr algn="l">
+              <a:lnSpc>
+                <a:spcPct val="125000"/>
+              </a:lnSpc>
+            </a:pPr>
+            <a:r>
+              <a:rPr sz="1050" b="0">
+                <a:solidFill>
+                  <a:srgbClr val="2F3B40"/>
+                </a:solidFill>
+                <a:latin typeface="Zen Maru Gothic"/>
+                <a:ea typeface="Zen Maru Gothic"/>
+                <a:cs typeface="Zen Maru Gothic"/>
+              </a:rPr>
+              <a:t>材料費が入っているか</a:t>
+            </a:r>
+          </a:p>
+        </p:txBody>
+      </p:sp>
+      <p:sp>
+        <p:nvSpPr>
+          <p:cNvPr id="25" name="Rounded Rectangle 24"/>
+          <p:cNvSpPr/>
+          <p:nvPr/>
+        </p:nvSpPr>
+        <p:spPr>
+          <a:xfrm>
+            <a:off x="720000" y="4204800"/>
+            <a:ext cx="180000" cy="180000"/>
+          </a:xfrm>
+          <a:prstGeom prst="roundRect">
+            <a:avLst>
+              <a:gd name="adj" fmla="val 20000"/>
+            </a:avLst>
+          </a:prstGeom>
+          <a:solidFill>
+            <a:srgbClr val="FFFFFF"/>
+          </a:solidFill>
+          <a:ln w="18000">
+            <a:solidFill>
+              <a:srgbClr val="2A8C99"/>
+            </a:solidFill>
+          </a:ln>
+        </p:spPr>
+        <p:txBody>
+          <a:bodyPr rtlCol="0" anchor="ctr"/>
+          <a:lstStyle/>
+          <a:p/>
+        </p:txBody>
+      </p:sp>
+      <p:sp>
+        <p:nvSpPr>
+          <p:cNvPr id="26" name="TextBox 25"/>
+          <p:cNvSpPr txBox="1"/>
+          <p:nvPr/>
+        </p:nvSpPr>
+        <p:spPr>
+          <a:xfrm>
+            <a:off x="1044000" y="4176000"/>
+            <a:ext cx="1800000" cy="252000"/>
+          </a:xfrm>
+          <a:prstGeom prst="rect">
+            <a:avLst/>
+          </a:prstGeom>
+          <a:noFill/>
+        </p:spPr>
+        <p:txBody>
+          <a:bodyPr wrap="square" lIns="0" rIns="0" tIns="0" bIns="0" anchor="t">
+            <a:spAutoFit/>
+          </a:bodyPr>
+          <a:lstStyle/>
+          <a:p>
+            <a:pPr algn="l">
+              <a:lnSpc>
+                <a:spcPct val="125000"/>
+              </a:lnSpc>
+            </a:pPr>
+            <a:r>
+              <a:rPr sz="1100" b="1">
+                <a:solidFill>
+                  <a:srgbClr val="2F3B40"/>
+                </a:solidFill>
+                <a:latin typeface="Zen Maru Gothic"/>
+                <a:ea typeface="Zen Maru Gothic"/>
+                <a:cs typeface="Zen Maru Gothic"/>
+              </a:rPr>
+              <a:t>定員と決め方</a:t>
+            </a:r>
+          </a:p>
+        </p:txBody>
+      </p:sp>
+      <p:sp>
+        <p:nvSpPr>
+          <p:cNvPr id="27" name="TextBox 26"/>
+          <p:cNvSpPr txBox="1"/>
+          <p:nvPr/>
+        </p:nvSpPr>
+        <p:spPr>
+          <a:xfrm>
+            <a:off x="2880000" y="4186800"/>
+            <a:ext cx="3960000" cy="252000"/>
+          </a:xfrm>
+          <a:prstGeom prst="rect">
+            <a:avLst/>
+          </a:prstGeom>
+          <a:noFill/>
+        </p:spPr>
+        <p:txBody>
+          <a:bodyPr wrap="square" lIns="0" rIns="0" tIns="0" bIns="0" anchor="t">
+            <a:spAutoFit/>
+          </a:bodyPr>
+          <a:lstStyle/>
+          <a:p>
+            <a:pPr algn="l">
+              <a:lnSpc>
+                <a:spcPct val="125000"/>
+              </a:lnSpc>
+            </a:pPr>
+            <a:r>
+              <a:rPr sz="1050" b="0">
+                <a:solidFill>
+                  <a:srgbClr val="2F3B40"/>
+                </a:solidFill>
+                <a:latin typeface="Zen Maru Gothic"/>
+                <a:ea typeface="Zen Maru Gothic"/>
+                <a:cs typeface="Zen Maru Gothic"/>
+              </a:rPr>
+              <a:t>先着順・抽選など</a:t>
+            </a:r>
+          </a:p>
+        </p:txBody>
+      </p:sp>
+      <p:sp>
+        <p:nvSpPr>
+          <p:cNvPr id="28" name="Rounded Rectangle 27"/>
+          <p:cNvSpPr/>
+          <p:nvPr/>
+        </p:nvSpPr>
+        <p:spPr>
+          <a:xfrm>
+            <a:off x="720000" y="4600800"/>
+            <a:ext cx="180000" cy="180000"/>
+          </a:xfrm>
+          <a:prstGeom prst="roundRect">
+            <a:avLst>
+              <a:gd name="adj" fmla="val 20000"/>
+            </a:avLst>
+          </a:prstGeom>
+          <a:solidFill>
+            <a:srgbClr val="FFFFFF"/>
+          </a:solidFill>
+          <a:ln w="18000">
+            <a:solidFill>
+              <a:srgbClr val="2A8C99"/>
+            </a:solidFill>
+          </a:ln>
+        </p:spPr>
+        <p:txBody>
+          <a:bodyPr rtlCol="0" anchor="ctr"/>
+          <a:lstStyle/>
+          <a:p/>
+        </p:txBody>
+      </p:sp>
+      <p:sp>
+        <p:nvSpPr>
+          <p:cNvPr id="29" name="TextBox 28"/>
+          <p:cNvSpPr txBox="1"/>
+          <p:nvPr/>
+        </p:nvSpPr>
+        <p:spPr>
+          <a:xfrm>
+            <a:off x="1044000" y="4572000"/>
+            <a:ext cx="1800000" cy="252000"/>
+          </a:xfrm>
+          <a:prstGeom prst="rect">
+            <a:avLst/>
+          </a:prstGeom>
+          <a:noFill/>
+        </p:spPr>
+        <p:txBody>
+          <a:bodyPr wrap="square" lIns="0" rIns="0" tIns="0" bIns="0" anchor="t">
+            <a:spAutoFit/>
+          </a:bodyPr>
+          <a:lstStyle/>
+          <a:p>
+            <a:pPr algn="l">
+              <a:lnSpc>
+                <a:spcPct val="125000"/>
+              </a:lnSpc>
+            </a:pPr>
+            <a:r>
+              <a:rPr sz="1100" b="1">
+                <a:solidFill>
+                  <a:srgbClr val="2F3B40"/>
+                </a:solidFill>
+                <a:latin typeface="Zen Maru Gothic"/>
+                <a:ea typeface="Zen Maru Gothic"/>
+                <a:cs typeface="Zen Maru Gothic"/>
+              </a:rPr>
+              <a:t>持ち物・服装</a:t>
+            </a:r>
+          </a:p>
+        </p:txBody>
+      </p:sp>
+      <p:sp>
+        <p:nvSpPr>
+          <p:cNvPr id="30" name="TextBox 29"/>
+          <p:cNvSpPr txBox="1"/>
+          <p:nvPr/>
+        </p:nvSpPr>
+        <p:spPr>
+          <a:xfrm>
+            <a:off x="2880000" y="4582800"/>
+            <a:ext cx="3960000" cy="252000"/>
+          </a:xfrm>
+          <a:prstGeom prst="rect">
+            <a:avLst/>
+          </a:prstGeom>
+          <a:noFill/>
+        </p:spPr>
+        <p:txBody>
+          <a:bodyPr wrap="square" lIns="0" rIns="0" tIns="0" bIns="0" anchor="t">
+            <a:spAutoFit/>
+          </a:bodyPr>
+          <a:lstStyle/>
+          <a:p>
+            <a:pPr algn="l">
+              <a:lnSpc>
+                <a:spcPct val="125000"/>
+              </a:lnSpc>
+            </a:pPr>
+            <a:r>
+              <a:rPr sz="1050" b="0">
+                <a:solidFill>
+                  <a:srgbClr val="2F3B40"/>
+                </a:solidFill>
+                <a:latin typeface="Zen Maru Gothic"/>
+                <a:ea typeface="Zen Maru Gothic"/>
+                <a:cs typeface="Zen Maru Gothic"/>
+              </a:rPr>
+              <a:t>よごれてもいい服など</a:t>
+            </a:r>
+          </a:p>
+        </p:txBody>
+      </p:sp>
+      <p:sp>
+        <p:nvSpPr>
+          <p:cNvPr id="31" name="Rounded Rectangle 30"/>
+          <p:cNvSpPr/>
+          <p:nvPr/>
+        </p:nvSpPr>
+        <p:spPr>
+          <a:xfrm>
+            <a:off x="720000" y="4996800"/>
+            <a:ext cx="180000" cy="180000"/>
+          </a:xfrm>
+          <a:prstGeom prst="roundRect">
+            <a:avLst>
+              <a:gd name="adj" fmla="val 20000"/>
+            </a:avLst>
+          </a:prstGeom>
+          <a:solidFill>
+            <a:srgbClr val="FFFFFF"/>
+          </a:solidFill>
+          <a:ln w="18000">
+            <a:solidFill>
+              <a:srgbClr val="2A8C99"/>
+            </a:solidFill>
+          </a:ln>
+        </p:spPr>
+        <p:txBody>
+          <a:bodyPr rtlCol="0" anchor="ctr"/>
+          <a:lstStyle/>
+          <a:p/>
+        </p:txBody>
+      </p:sp>
+      <p:sp>
+        <p:nvSpPr>
+          <p:cNvPr id="32" name="TextBox 31"/>
+          <p:cNvSpPr txBox="1"/>
+          <p:nvPr/>
+        </p:nvSpPr>
+        <p:spPr>
+          <a:xfrm>
+            <a:off x="1044000" y="4968000"/>
+            <a:ext cx="1800000" cy="252000"/>
+          </a:xfrm>
+          <a:prstGeom prst="rect">
+            <a:avLst/>
+          </a:prstGeom>
+          <a:noFill/>
+        </p:spPr>
+        <p:txBody>
+          <a:bodyPr wrap="square" lIns="0" rIns="0" tIns="0" bIns="0" anchor="t">
+            <a:spAutoFit/>
+          </a:bodyPr>
+          <a:lstStyle/>
+          <a:p>
+            <a:pPr algn="l">
+              <a:lnSpc>
+                <a:spcPct val="125000"/>
+              </a:lnSpc>
+            </a:pPr>
+            <a:r>
+              <a:rPr sz="1100" b="1">
+                <a:solidFill>
+                  <a:srgbClr val="2F3B40"/>
+                </a:solidFill>
+                <a:latin typeface="Zen Maru Gothic"/>
+                <a:ea typeface="Zen Maru Gothic"/>
+                <a:cs typeface="Zen Maru Gothic"/>
+              </a:rPr>
+              <a:t>場所</a:t>
+            </a:r>
+          </a:p>
+        </p:txBody>
+      </p:sp>
+      <p:sp>
+        <p:nvSpPr>
+          <p:cNvPr id="33" name="TextBox 32"/>
+          <p:cNvSpPr txBox="1"/>
+          <p:nvPr/>
+        </p:nvSpPr>
+        <p:spPr>
+          <a:xfrm>
+            <a:off x="2880000" y="4978800"/>
+            <a:ext cx="3960000" cy="252000"/>
+          </a:xfrm>
+          <a:prstGeom prst="rect">
+            <a:avLst/>
+          </a:prstGeom>
+          <a:noFill/>
+        </p:spPr>
+        <p:txBody>
+          <a:bodyPr wrap="square" lIns="0" rIns="0" tIns="0" bIns="0" anchor="t">
+            <a:spAutoFit/>
+          </a:bodyPr>
+          <a:lstStyle/>
+          <a:p>
+            <a:pPr algn="l">
+              <a:lnSpc>
+                <a:spcPct val="125000"/>
+              </a:lnSpc>
+            </a:pPr>
+            <a:r>
+              <a:rPr sz="1050" b="0">
+                <a:solidFill>
+                  <a:srgbClr val="2F3B40"/>
+                </a:solidFill>
+                <a:latin typeface="Zen Maru Gothic"/>
+                <a:ea typeface="Zen Maru Gothic"/>
+                <a:cs typeface="Zen Maru Gothic"/>
+              </a:rPr>
+              <a:t>自宅教室は、どこまで公開するか決める</a:t>
+            </a:r>
+          </a:p>
+        </p:txBody>
+      </p:sp>
+      <p:sp>
+        <p:nvSpPr>
+          <p:cNvPr id="34" name="Rounded Rectangle 33"/>
+          <p:cNvSpPr/>
+          <p:nvPr/>
+        </p:nvSpPr>
+        <p:spPr>
+          <a:xfrm>
+            <a:off x="720000" y="5392800"/>
+            <a:ext cx="180000" cy="180000"/>
+          </a:xfrm>
+          <a:prstGeom prst="roundRect">
+            <a:avLst>
+              <a:gd name="adj" fmla="val 20000"/>
+            </a:avLst>
+          </a:prstGeom>
+          <a:solidFill>
+            <a:srgbClr val="FFFFFF"/>
+          </a:solidFill>
+          <a:ln w="18000">
+            <a:solidFill>
+              <a:srgbClr val="2A8C99"/>
+            </a:solidFill>
+          </a:ln>
+        </p:spPr>
+        <p:txBody>
+          <a:bodyPr rtlCol="0" anchor="ctr"/>
+          <a:lstStyle/>
+          <a:p/>
+        </p:txBody>
+      </p:sp>
+      <p:sp>
+        <p:nvSpPr>
+          <p:cNvPr id="35" name="TextBox 34"/>
+          <p:cNvSpPr txBox="1"/>
+          <p:nvPr/>
+        </p:nvSpPr>
+        <p:spPr>
+          <a:xfrm>
+            <a:off x="1044000" y="5364000"/>
+            <a:ext cx="1800000" cy="252000"/>
+          </a:xfrm>
+          <a:prstGeom prst="rect">
+            <a:avLst/>
+          </a:prstGeom>
+          <a:noFill/>
+        </p:spPr>
+        <p:txBody>
+          <a:bodyPr wrap="square" lIns="0" rIns="0" tIns="0" bIns="0" anchor="t">
+            <a:spAutoFit/>
+          </a:bodyPr>
+          <a:lstStyle/>
+          <a:p>
+            <a:pPr algn="l">
+              <a:lnSpc>
+                <a:spcPct val="125000"/>
+              </a:lnSpc>
+            </a:pPr>
+            <a:r>
+              <a:rPr sz="1100" b="1">
+                <a:solidFill>
+                  <a:srgbClr val="2F3B40"/>
+                </a:solidFill>
+                <a:latin typeface="Zen Maru Gothic"/>
+                <a:ea typeface="Zen Maru Gothic"/>
+                <a:cs typeface="Zen Maru Gothic"/>
+              </a:rPr>
+              <a:t>申し込み方法</a:t>
+            </a:r>
+          </a:p>
+        </p:txBody>
+      </p:sp>
+      <p:sp>
+        <p:nvSpPr>
+          <p:cNvPr id="36" name="TextBox 35"/>
+          <p:cNvSpPr txBox="1"/>
+          <p:nvPr/>
+        </p:nvSpPr>
+        <p:spPr>
+          <a:xfrm>
+            <a:off x="2880000" y="5374800"/>
+            <a:ext cx="3960000" cy="252000"/>
+          </a:xfrm>
+          <a:prstGeom prst="rect">
+            <a:avLst/>
+          </a:prstGeom>
+          <a:noFill/>
+        </p:spPr>
+        <p:txBody>
+          <a:bodyPr wrap="square" lIns="0" rIns="0" tIns="0" bIns="0" anchor="t">
+            <a:spAutoFit/>
+          </a:bodyPr>
+          <a:lstStyle/>
+          <a:p>
+            <a:pPr algn="l">
+              <a:lnSpc>
+                <a:spcPct val="125000"/>
+              </a:lnSpc>
+            </a:pPr>
+            <a:r>
+              <a:rPr sz="1050" b="0">
+                <a:solidFill>
+                  <a:srgbClr val="2F3B40"/>
+                </a:solidFill>
+                <a:latin typeface="Zen Maru Gothic"/>
+                <a:ea typeface="Zen Maru Gothic"/>
+                <a:cs typeface="Zen Maru Gothic"/>
+              </a:rPr>
+              <a:t>何を送ってもらうか（名前・年齢・希望日）</a:t>
+            </a:r>
+          </a:p>
+        </p:txBody>
+      </p:sp>
+      <p:sp>
+        <p:nvSpPr>
+          <p:cNvPr id="37" name="Rounded Rectangle 36"/>
+          <p:cNvSpPr/>
+          <p:nvPr/>
+        </p:nvSpPr>
+        <p:spPr>
+          <a:xfrm>
+            <a:off x="720000" y="5788800"/>
+            <a:ext cx="180000" cy="180000"/>
+          </a:xfrm>
+          <a:prstGeom prst="roundRect">
+            <a:avLst>
+              <a:gd name="adj" fmla="val 20000"/>
+            </a:avLst>
+          </a:prstGeom>
+          <a:solidFill>
+            <a:srgbClr val="FFFFFF"/>
+          </a:solidFill>
+          <a:ln w="18000">
+            <a:solidFill>
+              <a:srgbClr val="2A8C99"/>
+            </a:solidFill>
+          </a:ln>
+        </p:spPr>
+        <p:txBody>
+          <a:bodyPr rtlCol="0" anchor="ctr"/>
+          <a:lstStyle/>
+          <a:p/>
+        </p:txBody>
+      </p:sp>
+      <p:sp>
+        <p:nvSpPr>
+          <p:cNvPr id="38" name="TextBox 37"/>
+          <p:cNvSpPr txBox="1"/>
+          <p:nvPr/>
+        </p:nvSpPr>
+        <p:spPr>
+          <a:xfrm>
+            <a:off x="1044000" y="5760000"/>
+            <a:ext cx="1800000" cy="252000"/>
+          </a:xfrm>
+          <a:prstGeom prst="rect">
+            <a:avLst/>
+          </a:prstGeom>
+          <a:noFill/>
+        </p:spPr>
+        <p:txBody>
+          <a:bodyPr wrap="square" lIns="0" rIns="0" tIns="0" bIns="0" anchor="t">
+            <a:spAutoFit/>
+          </a:bodyPr>
+          <a:lstStyle/>
+          <a:p>
+            <a:pPr algn="l">
+              <a:lnSpc>
+                <a:spcPct val="125000"/>
+              </a:lnSpc>
+            </a:pPr>
+            <a:r>
+              <a:rPr sz="1100" b="1">
+                <a:solidFill>
+                  <a:srgbClr val="2F3B40"/>
+                </a:solidFill>
+                <a:latin typeface="Zen Maru Gothic"/>
+                <a:ea typeface="Zen Maru Gothic"/>
+                <a:cs typeface="Zen Maru Gothic"/>
+              </a:rPr>
+              <a:t>しめきり</a:t>
+            </a:r>
+          </a:p>
+        </p:txBody>
+      </p:sp>
+      <p:sp>
+        <p:nvSpPr>
+          <p:cNvPr id="39" name="TextBox 38"/>
+          <p:cNvSpPr txBox="1"/>
+          <p:nvPr/>
+        </p:nvSpPr>
+        <p:spPr>
+          <a:xfrm>
+            <a:off x="2880000" y="5770800"/>
+            <a:ext cx="3960000" cy="252000"/>
+          </a:xfrm>
+          <a:prstGeom prst="rect">
+            <a:avLst/>
+          </a:prstGeom>
+          <a:noFill/>
+        </p:spPr>
+        <p:txBody>
+          <a:bodyPr wrap="square" lIns="0" rIns="0" tIns="0" bIns="0" anchor="t">
+            <a:spAutoFit/>
+          </a:bodyPr>
+          <a:lstStyle/>
+          <a:p>
+            <a:pPr algn="l">
+              <a:lnSpc>
+                <a:spcPct val="125000"/>
+              </a:lnSpc>
+            </a:pPr>
+            <a:r>
+              <a:rPr sz="1050" b="0">
+                <a:solidFill>
+                  <a:srgbClr val="2F3B40"/>
+                </a:solidFill>
+                <a:latin typeface="Zen Maru Gothic"/>
+                <a:ea typeface="Zen Maru Gothic"/>
+                <a:cs typeface="Zen Maru Gothic"/>
+              </a:rPr>
+              <a:t>日付と曜日</a:t>
+            </a:r>
+          </a:p>
+        </p:txBody>
+      </p:sp>
+      <p:sp>
+        <p:nvSpPr>
+          <p:cNvPr id="40" name="Rounded Rectangle 39"/>
+          <p:cNvSpPr/>
+          <p:nvPr/>
+        </p:nvSpPr>
+        <p:spPr>
+          <a:xfrm>
+            <a:off x="720000" y="6184800"/>
+            <a:ext cx="180000" cy="180000"/>
+          </a:xfrm>
+          <a:prstGeom prst="roundRect">
+            <a:avLst>
+              <a:gd name="adj" fmla="val 20000"/>
+            </a:avLst>
+          </a:prstGeom>
+          <a:solidFill>
+            <a:srgbClr val="FFFFFF"/>
+          </a:solidFill>
+          <a:ln w="18000">
+            <a:solidFill>
+              <a:srgbClr val="2A8C99"/>
+            </a:solidFill>
+          </a:ln>
+        </p:spPr>
+        <p:txBody>
+          <a:bodyPr rtlCol="0" anchor="ctr"/>
+          <a:lstStyle/>
+          <a:p/>
+        </p:txBody>
+      </p:sp>
+      <p:sp>
+        <p:nvSpPr>
+          <p:cNvPr id="41" name="TextBox 40"/>
+          <p:cNvSpPr txBox="1"/>
+          <p:nvPr/>
+        </p:nvSpPr>
+        <p:spPr>
+          <a:xfrm>
+            <a:off x="1044000" y="6156000"/>
+            <a:ext cx="1800000" cy="252000"/>
+          </a:xfrm>
+          <a:prstGeom prst="rect">
+            <a:avLst/>
+          </a:prstGeom>
+          <a:noFill/>
+        </p:spPr>
+        <p:txBody>
+          <a:bodyPr wrap="square" lIns="0" rIns="0" tIns="0" bIns="0" anchor="t">
+            <a:spAutoFit/>
+          </a:bodyPr>
+          <a:lstStyle/>
+          <a:p>
+            <a:pPr algn="l">
+              <a:lnSpc>
+                <a:spcPct val="125000"/>
+              </a:lnSpc>
+            </a:pPr>
+            <a:r>
+              <a:rPr sz="1100" b="1">
+                <a:solidFill>
+                  <a:srgbClr val="2F3B40"/>
+                </a:solidFill>
+                <a:latin typeface="Zen Maru Gothic"/>
+                <a:ea typeface="Zen Maru Gothic"/>
+                <a:cs typeface="Zen Maru Gothic"/>
+              </a:rPr>
+              <a:t>安心できる一言</a:t>
+            </a:r>
+          </a:p>
+        </p:txBody>
+      </p:sp>
+      <p:sp>
+        <p:nvSpPr>
+          <p:cNvPr id="42" name="TextBox 41"/>
+          <p:cNvSpPr txBox="1"/>
+          <p:nvPr/>
+        </p:nvSpPr>
+        <p:spPr>
+          <a:xfrm>
+            <a:off x="2880000" y="6166800"/>
+            <a:ext cx="3960000" cy="252000"/>
+          </a:xfrm>
+          <a:prstGeom prst="rect">
+            <a:avLst/>
+          </a:prstGeom>
+          <a:noFill/>
+        </p:spPr>
+        <p:txBody>
+          <a:bodyPr wrap="square" lIns="0" rIns="0" tIns="0" bIns="0" anchor="t">
+            <a:spAutoFit/>
+          </a:bodyPr>
+          <a:lstStyle/>
+          <a:p>
+            <a:pPr algn="l">
+              <a:lnSpc>
+                <a:spcPct val="125000"/>
+              </a:lnSpc>
+            </a:pPr>
+            <a:r>
+              <a:rPr sz="1050" b="0">
+                <a:solidFill>
+                  <a:srgbClr val="2F3B40"/>
+                </a:solidFill>
+                <a:latin typeface="Zen Maru Gothic"/>
+                <a:ea typeface="Zen Maru Gothic"/>
+                <a:cs typeface="Zen Maru Gothic"/>
+              </a:rPr>
+              <a:t>見学だけ・相談だけでもよい、など</a:t>
+            </a:r>
+          </a:p>
+        </p:txBody>
+      </p:sp>
+      <p:sp>
+        <p:nvSpPr>
+          <p:cNvPr id="43" name="Rounded Rectangle 42"/>
+          <p:cNvSpPr/>
+          <p:nvPr/>
+        </p:nvSpPr>
+        <p:spPr>
+          <a:xfrm>
+            <a:off x="648000" y="6696000"/>
+            <a:ext cx="6264000" cy="2376000"/>
+          </a:xfrm>
+          <a:prstGeom prst="roundRect">
+            <a:avLst>
+              <a:gd name="adj" fmla="val 5000"/>
+            </a:avLst>
+          </a:prstGeom>
+          <a:solidFill>
+            <a:srgbClr val="EAF6F7"/>
+          </a:solidFill>
+          <a:ln>
+            <a:noFill/>
+          </a:ln>
+        </p:spPr>
+        <p:txBody>
+          <a:bodyPr rtlCol="0" anchor="ctr"/>
+          <a:lstStyle/>
+          <a:p/>
+        </p:txBody>
+      </p:sp>
+      <p:sp>
+        <p:nvSpPr>
+          <p:cNvPr id="44" name="TextBox 43"/>
+          <p:cNvSpPr txBox="1"/>
+          <p:nvPr/>
+        </p:nvSpPr>
+        <p:spPr>
+          <a:xfrm>
+            <a:off x="864000" y="6912000"/>
+            <a:ext cx="5832000" cy="7200000"/>
+          </a:xfrm>
+          <a:prstGeom prst="rect">
+            <a:avLst/>
+          </a:prstGeom>
+          <a:noFill/>
+        </p:spPr>
+        <p:txBody>
+          <a:bodyPr wrap="square" lIns="0" rIns="0" tIns="0" bIns="0" anchor="t">
+            <a:spAutoFit/>
+          </a:bodyPr>
+          <a:lstStyle/>
+          <a:p>
+            <a:pPr algn="l">
+              <a:lnSpc>
                 <a:spcPct val="145000"/>
               </a:lnSpc>
             </a:pPr>
@@ -7371,6 +7696,331 @@
                 <a:ea typeface="Zen Maru Gothic"/>
                 <a:cs typeface="Zen Maru Gothic"/>
               </a:rPr>
+              <a:t>公開・印刷の前に</a:t>
+            </a:r>
+          </a:p>
+          <a:p>
+            <a:pPr algn="l">
+              <a:lnSpc>
+                <a:spcPct val="145000"/>
+              </a:lnSpc>
+            </a:pPr>
+            <a:r>
+              <a:rPr sz="1050" b="0">
+                <a:solidFill>
+                  <a:srgbClr val="2F3B40"/>
+                </a:solidFill>
+                <a:latin typeface="Zen Maru Gothic"/>
+                <a:ea typeface="Zen Maru Gothic"/>
+                <a:cs typeface="Zen Maru Gothic"/>
+              </a:rPr>
+              <a:t>・日付と曜日が合っているか</a:t>
+            </a:r>
+          </a:p>
+          <a:p>
+            <a:pPr algn="l">
+              <a:lnSpc>
+                <a:spcPct val="145000"/>
+              </a:lnSpc>
+            </a:pPr>
+            <a:r>
+              <a:rPr sz="1050" b="0">
+                <a:solidFill>
+                  <a:srgbClr val="2F3B40"/>
+                </a:solidFill>
+                <a:latin typeface="Zen Maru Gothic"/>
+                <a:ea typeface="Zen Maru Gothic"/>
+                <a:cs typeface="Zen Maru Gothic"/>
+              </a:rPr>
+              <a:t>・料金や時間の数字が、全部の画像とチラシでそろっているか</a:t>
+            </a:r>
+          </a:p>
+          <a:p>
+            <a:pPr algn="l">
+              <a:lnSpc>
+                <a:spcPct val="145000"/>
+              </a:lnSpc>
+            </a:pPr>
+            <a:r>
+              <a:rPr sz="1050" b="0">
+                <a:solidFill>
+                  <a:srgbClr val="2F3B40"/>
+                </a:solidFill>
+                <a:latin typeface="Zen Maru Gothic"/>
+                <a:ea typeface="Zen Maru Gothic"/>
+                <a:cs typeface="Zen Maru Gothic"/>
+              </a:rPr>
+              <a:t>・電話番号、URL、QRコードが正しく開けるか</a:t>
+            </a:r>
+          </a:p>
+          <a:p>
+            <a:pPr algn="l">
+              <a:lnSpc>
+                <a:spcPct val="145000"/>
+              </a:lnSpc>
+            </a:pPr>
+            <a:r>
+              <a:rPr sz="1050" b="0">
+                <a:solidFill>
+                  <a:srgbClr val="2F3B40"/>
+                </a:solidFill>
+                <a:latin typeface="Zen Maru Gothic"/>
+                <a:ea typeface="Zen Maru Gothic"/>
+                <a:cs typeface="Zen Maru Gothic"/>
+              </a:rPr>
+              <a:t>・写真に写っている人の許可があるか（お子さんの写真は保護者の許可）</a:t>
+            </a:r>
+          </a:p>
+          <a:p>
+            <a:pPr algn="l">
+              <a:lnSpc>
+                <a:spcPct val="145000"/>
+              </a:lnSpc>
+            </a:pPr>
+            <a:r>
+              <a:rPr sz="1050" b="0">
+                <a:solidFill>
+                  <a:srgbClr val="2F3B40"/>
+                </a:solidFill>
+                <a:latin typeface="Zen Maru Gothic"/>
+                <a:ea typeface="Zen Maru Gothic"/>
+                <a:cs typeface="Zen Maru Gothic"/>
+              </a:rPr>
+              <a:t>・住所や家の外観など、出したくない情報が写っていないか</a:t>
+            </a:r>
+          </a:p>
+          <a:p>
+            <a:pPr algn="l">
+              <a:lnSpc>
+                <a:spcPct val="145000"/>
+              </a:lnSpc>
+            </a:pPr>
+            <a:r>
+              <a:rPr sz="1050" b="0">
+                <a:solidFill>
+                  <a:srgbClr val="2F3B40"/>
+                </a:solidFill>
+                <a:latin typeface="Zen Maru Gothic"/>
+                <a:ea typeface="Zen Maru Gothic"/>
+                <a:cs typeface="Zen Maru Gothic"/>
+              </a:rPr>
+              <a:t>・チラシは、試しに1枚印刷して文字が切れていないか</a:t>
+            </a:r>
+          </a:p>
+        </p:txBody>
+      </p:sp>
+    </p:spTree>
+  </p:cSld>
+  <p:clrMapOvr>
+    <a:masterClrMapping/>
+  </p:clrMapOvr>
+</p:sld>
+</file>
+
+<file path=ppt/slides/slide5.xml><?xml version="1.0" encoding="utf-8"?>
+<p:sld xmlns:a="http://schemas.openxmlformats.org/drawingml/2006/main" xmlns:p="http://schemas.openxmlformats.org/presentationml/2006/main" xmlns:r="http://schemas.openxmlformats.org/officeDocument/2006/relationships">
+  <p:cSld>
+    <p:bg>
+      <p:bgPr>
+        <a:solidFill>
+          <a:srgbClr val="FFFFFF"/>
+        </a:solidFill>
+        <a:effectLst/>
+      </p:bgPr>
+    </p:bg>
+    <p:spTree>
+      <p:nvGrpSpPr>
+        <p:cNvPr id="1" name=""/>
+        <p:cNvGrpSpPr/>
+        <p:nvPr/>
+      </p:nvGrpSpPr>
+      <p:grpSpPr/>
+      <p:sp>
+        <p:nvSpPr>
+          <p:cNvPr id="2" name="上の帯"/>
+          <p:cNvSpPr/>
+          <p:nvPr/>
+        </p:nvSpPr>
+        <p:spPr>
+          <a:xfrm>
+            <a:off x="0" y="0"/>
+            <a:ext cx="7560000" cy="1080000"/>
+          </a:xfrm>
+          <a:prstGeom prst="rect">
+            <a:avLst/>
+          </a:prstGeom>
+          <a:solidFill>
+            <a:srgbClr val="EAF6F7"/>
+          </a:solidFill>
+          <a:ln>
+            <a:noFill/>
+          </a:ln>
+        </p:spPr>
+        <p:txBody>
+          <a:bodyPr rtlCol="0" anchor="ctr"/>
+          <a:lstStyle/>
+          <a:p/>
+        </p:txBody>
+      </p:sp>
+      <p:sp>
+        <p:nvSpPr>
+          <p:cNvPr id="3" name="見出し"/>
+          <p:cNvSpPr txBox="1"/>
+          <p:nvPr/>
+        </p:nvSpPr>
+        <p:spPr>
+          <a:xfrm>
+            <a:off x="648000" y="324000"/>
+            <a:ext cx="5400000" cy="504000"/>
+          </a:xfrm>
+          <a:prstGeom prst="rect">
+            <a:avLst/>
+          </a:prstGeom>
+          <a:noFill/>
+        </p:spPr>
+        <p:txBody>
+          <a:bodyPr wrap="square" lIns="0" rIns="0" tIns="0" bIns="0" anchor="ctr">
+            <a:spAutoFit/>
+          </a:bodyPr>
+          <a:lstStyle/>
+          <a:p>
+            <a:pPr algn="l">
+              <a:lnSpc>
+                <a:spcPct val="125000"/>
+              </a:lnSpc>
+            </a:pPr>
+            <a:r>
+              <a:rPr sz="1800" b="1">
+                <a:solidFill>
+                  <a:srgbClr val="2A8C99"/>
+                </a:solidFill>
+                <a:latin typeface="Zen Maru Gothic"/>
+                <a:ea typeface="Zen Maru Gothic"/>
+                <a:cs typeface="Zen Maru Gothic"/>
+              </a:rPr>
+              <a:t>文例と利用範囲</a:t>
+            </a:r>
+          </a:p>
+        </p:txBody>
+      </p:sp>
+      <p:sp>
+        <p:nvSpPr>
+          <p:cNvPr id="4" name="ページ"/>
+          <p:cNvSpPr txBox="1"/>
+          <p:nvPr/>
+        </p:nvSpPr>
+        <p:spPr>
+          <a:xfrm>
+            <a:off x="5760000" y="432000"/>
+            <a:ext cx="1152000" cy="288000"/>
+          </a:xfrm>
+          <a:prstGeom prst="rect">
+            <a:avLst/>
+          </a:prstGeom>
+          <a:noFill/>
+        </p:spPr>
+        <p:txBody>
+          <a:bodyPr wrap="square" lIns="0" rIns="0" tIns="0" bIns="0" anchor="t">
+            <a:spAutoFit/>
+          </a:bodyPr>
+          <a:lstStyle/>
+          <a:p>
+            <a:pPr algn="r">
+              <a:lnSpc>
+                <a:spcPct val="125000"/>
+              </a:lnSpc>
+            </a:pPr>
+            <a:r>
+              <a:rPr sz="900" b="0">
+                <a:solidFill>
+                  <a:srgbClr val="2F3B40"/>
+                </a:solidFill>
+                <a:latin typeface="Zen Maru Gothic"/>
+                <a:ea typeface="Zen Maru Gothic"/>
+                <a:cs typeface="Zen Maru Gothic"/>
+              </a:rPr>
+              <a:t>5 / 5</a:t>
+            </a:r>
+          </a:p>
+        </p:txBody>
+      </p:sp>
+      <p:sp>
+        <p:nvSpPr>
+          <p:cNvPr id="5" name="フッター"/>
+          <p:cNvSpPr txBox="1"/>
+          <p:nvPr/>
+        </p:nvSpPr>
+        <p:spPr>
+          <a:xfrm>
+            <a:off x="648000" y="10224000"/>
+            <a:ext cx="6264000" cy="216000"/>
+          </a:xfrm>
+          <a:prstGeom prst="rect">
+            <a:avLst/>
+          </a:prstGeom>
+          <a:noFill/>
+        </p:spPr>
+        <p:txBody>
+          <a:bodyPr wrap="square" lIns="0" rIns="0" tIns="0" bIns="0" anchor="t">
+            <a:spAutoFit/>
+          </a:bodyPr>
+          <a:lstStyle/>
+          <a:p>
+            <a:pPr algn="l">
+              <a:lnSpc>
+                <a:spcPct val="125000"/>
+              </a:lnSpc>
+            </a:pPr>
+            <a:r>
+              <a:rPr sz="800" b="0">
+                <a:solidFill>
+                  <a:srgbClr val="2A8C99"/>
+                </a:solidFill>
+                <a:latin typeface="Zen Maru Gothic"/>
+                <a:ea typeface="Zen Maru Gothic"/>
+                <a:cs typeface="Zen Maru Gothic"/>
+              </a:rPr>
+              <a:t>Sö-dä fuü　体験会のおしらせキット　v0.1</a:t>
+            </a:r>
+          </a:p>
+        </p:txBody>
+      </p:sp>
+      <p:sp>
+        <p:nvSpPr>
+          <p:cNvPr id="6" name="TextBox 5"/>
+          <p:cNvSpPr txBox="1"/>
+          <p:nvPr/>
+        </p:nvSpPr>
+        <p:spPr>
+          <a:xfrm>
+            <a:off x="648000" y="1368000"/>
+            <a:ext cx="6264000" cy="5040000"/>
+          </a:xfrm>
+          <a:prstGeom prst="rect">
+            <a:avLst/>
+          </a:prstGeom>
+          <a:noFill/>
+        </p:spPr>
+        <p:txBody>
+          <a:bodyPr wrap="square" lIns="0" rIns="0" tIns="0" bIns="0" anchor="t">
+            <a:spAutoFit/>
+          </a:bodyPr>
+          <a:lstStyle/>
+          <a:p>
+            <a:pPr algn="l">
+              <a:lnSpc>
+                <a:spcPct val="145000"/>
+              </a:lnSpc>
+            </a:pPr>
+            <a:r>
+              <a:rPr sz="1200" b="1">
+                <a:solidFill>
+                  <a:srgbClr val="2A8C99"/>
+                </a:solidFill>
+                <a:latin typeface="Zen Maru Gothic"/>
+                <a:ea typeface="Zen Maru Gothic"/>
+                <a:cs typeface="Zen Maru Gothic"/>
+              </a:rPr>
               <a:t>タイトルの文例（そのまま使えます）</a:t>
             </a:r>
           </a:p>
@@ -7452,7 +8102,7 @@
                 <a:spcPct val="145000"/>
               </a:lnSpc>
               <a:spcBef>
-                <a:spcPts val="800"/>
+                <a:spcPts val="600"/>
               </a:spcBef>
             </a:pPr>
             <a:r>
@@ -7527,7 +8177,7 @@
                 <a:spcPct val="145000"/>
               </a:lnSpc>
               <a:spcBef>
-                <a:spcPts val="800"/>
+                <a:spcPts val="600"/>
               </a:spcBef>
             </a:pPr>
             <a:r>
@@ -7539,7 +8189,7 @@
                 <a:ea typeface="Zen Maru Gothic"/>
                 <a:cs typeface="Zen Maru Gothic"/>
               </a:rPr>
-              <a:t>DM・LINEで送るお知らせ文</a:t>
+              <a:t>DM・LINEで送るおしらせ文</a:t>
             </a:r>
           </a:p>
           <a:p>
@@ -7557,7 +8207,43 @@
                 <a:ea typeface="Zen Maru Gothic"/>
                 <a:cs typeface="Zen Maru Gothic"/>
               </a:rPr>
-              <a:t>「冬の体験会のおしらせです。1月16日（土）と23日（土）の10時から、3〜6さいのお子さん向けに体験会をひらきます。料金は500円（材料費こみ）です。参加をご希望の方は、お名前・年齢・希望日を送ってください。」</a:t>
+              <a:t>冬の体験会のおしらせです。</a:t>
+            </a:r>
+          </a:p>
+          <a:p>
+            <a:pPr algn="l">
+              <a:lnSpc>
+                <a:spcPct val="145000"/>
+              </a:lnSpc>
+            </a:pPr>
+            <a:r>
+              <a:rPr sz="1000" b="0">
+                <a:solidFill>
+                  <a:srgbClr val="2F3B40"/>
+                </a:solidFill>
+                <a:latin typeface="Zen Maru Gothic"/>
+                <a:ea typeface="Zen Maru Gothic"/>
+                <a:cs typeface="Zen Maru Gothic"/>
+              </a:rPr>
+              <a:t>1月16日（土）と23日（土）の10:00〜11:00に、3さい〜年長さん向けの体験会をひらきます。場所は○○市○○町です（くわしくはお申し込み後にお知らせします）。</a:t>
+            </a:r>
+          </a:p>
+          <a:p>
+            <a:pPr algn="l">
+              <a:lnSpc>
+                <a:spcPct val="145000"/>
+              </a:lnSpc>
+            </a:pPr>
+            <a:r>
+              <a:rPr sz="1000" b="0">
+                <a:solidFill>
+                  <a:srgbClr val="2F3B40"/>
+                </a:solidFill>
+                <a:latin typeface="Zen Maru Gothic"/>
+                <a:ea typeface="Zen Maru Gothic"/>
+                <a:cs typeface="Zen Maru Gothic"/>
+              </a:rPr>
+              <a:t>料金は500円（材料費こみ）です。参加をご希望の方は、1月9日（土）までに、お名前・年齢・希望日を送ってください。</a:t>
             </a:r>
           </a:p>
         </p:txBody>
@@ -7815,8 +8501,8 @@
     </a:clrScheme>
     <a:fontScheme name="Office">
       <a:majorFont>
-        <a:latin typeface="Calibri"/>
-        <a:ea typeface=""/>
+        <a:latin typeface="Zen Maru Gothic"/>
+        <a:ea typeface="Zen Maru Gothic"/>
         <a:cs typeface=""/>
         <a:font script="Jpan" typeface="ＭＳ Ｐゴシック"/>
         <a:font script="Hang" typeface="맑은 고딕"/>
@@ -7850,8 +8536,8 @@
         <a:font script="Geor" typeface="Sylfaen"/>
       </a:majorFont>
       <a:minorFont>
-        <a:latin typeface="Calibri"/>
-        <a:ea typeface=""/>
+        <a:latin typeface="Zen Maru Gothic"/>
+        <a:ea typeface="Zen Maru Gothic"/>
         <a:cs typeface=""/>
         <a:font script="Jpan" typeface="ＭＳ Ｐゴシック"/>
         <a:font script="Hang" typeface="맑은 고딕"/>

--- a/product/01_taikenkai-kit/src/guide.pptx
+++ b/product/01_taikenkai-kit/src/guide.pptx
@@ -5268,7 +5268,7 @@
                 <a:ea typeface="Zen Maru Gothic"/>
                 <a:cs typeface="Zen Maru Gothic"/>
               </a:rPr>
-              <a:t>文字は1項目1〜2行までが目安です。長くなるときは、短く言いかえてください。</a:t>
+              <a:t>文字の量の目安：チラシの項目は1行まで、Instagramの項目は2行まで。長くなるときは、短く言いかえてください。</a:t>
             </a:r>
           </a:p>
         </p:txBody>
